--- a/PPT/Process-mgmt-1.pptx
+++ b/PPT/Process-mgmt-1.pptx
@@ -31,8 +31,8 @@
     <p:sldId id="430" r:id="rId22"/>
     <p:sldId id="432" r:id="rId23"/>
     <p:sldId id="478" r:id="rId24"/>
-    <p:sldId id="434" r:id="rId25"/>
-    <p:sldId id="471" r:id="rId26"/>
+    <p:sldId id="471" r:id="rId25"/>
+    <p:sldId id="434" r:id="rId26"/>
     <p:sldId id="502" r:id="rId27"/>
     <p:sldId id="435" r:id="rId28"/>
     <p:sldId id="436" r:id="rId29"/>
@@ -137,7 +137,7 @@
   </p:defaultTextStyle>
   <p:extLst>
     <p:ext uri="{EFAFB233-063F-42B5-8137-9DF3F51BA10A}">
-      <p15:sldGuideLst xmlns:p15="http://schemas.microsoft.com/office/powerpoint/2012/main"/>
+      <p15:sldGuideLst xmlns:p15="http://schemas.microsoft.com/office/powerpoint/2012/main" xmlns=""/>
     </p:ext>
   </p:extLst>
 </p:presentation>
@@ -225,7 +225,8 @@
           <a:p>
             <a:fld id="{CD1CB643-DCC8-44F3-A0A2-A3DCDD9E66E5}" type="datetimeFigureOut">
               <a:rPr lang="en-IN" smtClean="0"/>
-              <a:t>04-02-2026</a:t>
+              <a:pPr/>
+              <a:t>09-03-2026</a:t>
             </a:fld>
             <a:endParaRPr lang="en-IN"/>
           </a:p>
@@ -384,6 +385,7 @@
           <a:p>
             <a:fld id="{A7D70974-B9D7-44BB-842A-1DF1E23F6BCD}" type="slidenum">
               <a:rPr lang="en-IN" smtClean="0"/>
+              <a:pPr/>
               <a:t>‹#›</a:t>
             </a:fld>
             <a:endParaRPr lang="en-IN"/>
@@ -393,7 +395,7 @@
     </p:spTree>
     <p:extLst>
       <p:ext uri="{BB962C8B-B14F-4D97-AF65-F5344CB8AC3E}">
-        <p14:creationId xmlns:p14="http://schemas.microsoft.com/office/powerpoint/2010/main" val="303104196"/>
+        <p14:creationId xmlns:p14="http://schemas.microsoft.com/office/powerpoint/2010/main" xmlns="" val="303104196"/>
       </p:ext>
     </p:extLst>
   </p:cSld>
@@ -515,7 +517,7 @@
           <p:cNvPr id="8194" name="Rectangle 2">
             <a:extLst>
               <a:ext uri="{FF2B5EF4-FFF2-40B4-BE49-F238E27FC236}">
-                <a16:creationId xmlns:a16="http://schemas.microsoft.com/office/drawing/2014/main" id="{20DF96DF-3F74-4EB3-AA2E-7D9494973AAF}"/>
+                <a16:creationId xmlns:a16="http://schemas.microsoft.com/office/drawing/2014/main" xmlns="" id="{20DF96DF-3F74-4EB3-AA2E-7D9494973AAF}"/>
               </a:ext>
             </a:extLst>
           </p:cNvPr>
@@ -535,7 +537,7 @@
           <p:cNvPr id="8195" name="Rectangle 3">
             <a:extLst>
               <a:ext uri="{FF2B5EF4-FFF2-40B4-BE49-F238E27FC236}">
-                <a16:creationId xmlns:a16="http://schemas.microsoft.com/office/drawing/2014/main" id="{E2557FD8-EB60-4E74-935E-C71DFE670FCA}"/>
+                <a16:creationId xmlns:a16="http://schemas.microsoft.com/office/drawing/2014/main" xmlns="" id="{E2557FD8-EB60-4E74-935E-C71DFE670FCA}"/>
               </a:ext>
             </a:extLst>
           </p:cNvPr>
@@ -551,14 +553,14 @@
           <a:ln/>
           <a:extLst>
             <a:ext uri="{909E8E84-426E-40DD-AFC4-6F175D3DCCD1}">
-              <a14:hiddenFill xmlns:a14="http://schemas.microsoft.com/office/drawing/2010/main">
+              <a14:hiddenFill xmlns:a14="http://schemas.microsoft.com/office/drawing/2010/main" xmlns="">
                 <a:solidFill>
                   <a:srgbClr val="FFFFFF"/>
                 </a:solidFill>
               </a14:hiddenFill>
             </a:ext>
             <a:ext uri="{91240B29-F687-4F45-9708-019B960494DF}">
-              <a14:hiddenLine xmlns:a14="http://schemas.microsoft.com/office/drawing/2010/main" w="9525">
+              <a14:hiddenLine xmlns:a14="http://schemas.microsoft.com/office/drawing/2010/main" xmlns="" w="9525">
                 <a:solidFill>
                   <a:srgbClr val="000000"/>
                 </a:solidFill>
@@ -609,7 +611,7 @@
           <p:cNvPr id="28674" name="Rectangle 2">
             <a:extLst>
               <a:ext uri="{FF2B5EF4-FFF2-40B4-BE49-F238E27FC236}">
-                <a16:creationId xmlns:a16="http://schemas.microsoft.com/office/drawing/2014/main" id="{3D975521-C031-44A8-80BF-39B38B75F005}"/>
+                <a16:creationId xmlns:a16="http://schemas.microsoft.com/office/drawing/2014/main" xmlns="" id="{3D975521-C031-44A8-80BF-39B38B75F005}"/>
               </a:ext>
             </a:extLst>
           </p:cNvPr>
@@ -629,7 +631,7 @@
           <p:cNvPr id="28675" name="Rectangle 3">
             <a:extLst>
               <a:ext uri="{FF2B5EF4-FFF2-40B4-BE49-F238E27FC236}">
-                <a16:creationId xmlns:a16="http://schemas.microsoft.com/office/drawing/2014/main" id="{1A3DECD5-2795-49AC-8BF6-9DFEFF419D7D}"/>
+                <a16:creationId xmlns:a16="http://schemas.microsoft.com/office/drawing/2014/main" xmlns="" id="{1A3DECD5-2795-49AC-8BF6-9DFEFF419D7D}"/>
               </a:ext>
             </a:extLst>
           </p:cNvPr>
@@ -645,14 +647,14 @@
           <a:ln/>
           <a:extLst>
             <a:ext uri="{909E8E84-426E-40DD-AFC4-6F175D3DCCD1}">
-              <a14:hiddenFill xmlns:a14="http://schemas.microsoft.com/office/drawing/2010/main">
+              <a14:hiddenFill xmlns:a14="http://schemas.microsoft.com/office/drawing/2010/main" xmlns="">
                 <a:solidFill>
                   <a:srgbClr val="FFFFFF"/>
                 </a:solidFill>
               </a14:hiddenFill>
             </a:ext>
             <a:ext uri="{91240B29-F687-4F45-9708-019B960494DF}">
-              <a14:hiddenLine xmlns:a14="http://schemas.microsoft.com/office/drawing/2010/main" w="9525">
+              <a14:hiddenLine xmlns:a14="http://schemas.microsoft.com/office/drawing/2010/main" xmlns="" w="9525">
                 <a:solidFill>
                   <a:srgbClr val="000000"/>
                 </a:solidFill>
@@ -703,7 +705,7 @@
           <p:cNvPr id="30722" name="Rectangle 2">
             <a:extLst>
               <a:ext uri="{FF2B5EF4-FFF2-40B4-BE49-F238E27FC236}">
-                <a16:creationId xmlns:a16="http://schemas.microsoft.com/office/drawing/2014/main" id="{CBB1EDE5-9E4C-42E1-B87C-545C7237B73A}"/>
+                <a16:creationId xmlns:a16="http://schemas.microsoft.com/office/drawing/2014/main" xmlns="" id="{CBB1EDE5-9E4C-42E1-B87C-545C7237B73A}"/>
               </a:ext>
             </a:extLst>
           </p:cNvPr>
@@ -723,7 +725,7 @@
           <p:cNvPr id="30723" name="Rectangle 3">
             <a:extLst>
               <a:ext uri="{FF2B5EF4-FFF2-40B4-BE49-F238E27FC236}">
-                <a16:creationId xmlns:a16="http://schemas.microsoft.com/office/drawing/2014/main" id="{E24A6F99-D8AD-44C9-8834-3BFC2627FED8}"/>
+                <a16:creationId xmlns:a16="http://schemas.microsoft.com/office/drawing/2014/main" xmlns="" id="{E24A6F99-D8AD-44C9-8834-3BFC2627FED8}"/>
               </a:ext>
             </a:extLst>
           </p:cNvPr>
@@ -739,14 +741,14 @@
           <a:ln/>
           <a:extLst>
             <a:ext uri="{909E8E84-426E-40DD-AFC4-6F175D3DCCD1}">
-              <a14:hiddenFill xmlns:a14="http://schemas.microsoft.com/office/drawing/2010/main">
+              <a14:hiddenFill xmlns:a14="http://schemas.microsoft.com/office/drawing/2010/main" xmlns="">
                 <a:solidFill>
                   <a:srgbClr val="FFFFFF"/>
                 </a:solidFill>
               </a14:hiddenFill>
             </a:ext>
             <a:ext uri="{91240B29-F687-4F45-9708-019B960494DF}">
-              <a14:hiddenLine xmlns:a14="http://schemas.microsoft.com/office/drawing/2010/main" w="9525">
+              <a14:hiddenLine xmlns:a14="http://schemas.microsoft.com/office/drawing/2010/main" xmlns="" w="9525">
                 <a:solidFill>
                   <a:srgbClr val="000000"/>
                 </a:solidFill>
@@ -797,7 +799,7 @@
           <p:cNvPr id="32770" name="Rectangle 2">
             <a:extLst>
               <a:ext uri="{FF2B5EF4-FFF2-40B4-BE49-F238E27FC236}">
-                <a16:creationId xmlns:a16="http://schemas.microsoft.com/office/drawing/2014/main" id="{8A783162-EACC-46A4-B314-BFAA15B50D88}"/>
+                <a16:creationId xmlns:a16="http://schemas.microsoft.com/office/drawing/2014/main" xmlns="" id="{8A783162-EACC-46A4-B314-BFAA15B50D88}"/>
               </a:ext>
             </a:extLst>
           </p:cNvPr>
@@ -817,7 +819,7 @@
           <p:cNvPr id="32771" name="Rectangle 3">
             <a:extLst>
               <a:ext uri="{FF2B5EF4-FFF2-40B4-BE49-F238E27FC236}">
-                <a16:creationId xmlns:a16="http://schemas.microsoft.com/office/drawing/2014/main" id="{FDCB06C7-C4C1-4DF4-AE1C-75C2D1E2FA36}"/>
+                <a16:creationId xmlns:a16="http://schemas.microsoft.com/office/drawing/2014/main" xmlns="" id="{FDCB06C7-C4C1-4DF4-AE1C-75C2D1E2FA36}"/>
               </a:ext>
             </a:extLst>
           </p:cNvPr>
@@ -833,14 +835,14 @@
           <a:ln/>
           <a:extLst>
             <a:ext uri="{909E8E84-426E-40DD-AFC4-6F175D3DCCD1}">
-              <a14:hiddenFill xmlns:a14="http://schemas.microsoft.com/office/drawing/2010/main">
+              <a14:hiddenFill xmlns:a14="http://schemas.microsoft.com/office/drawing/2010/main" xmlns="">
                 <a:solidFill>
                   <a:srgbClr val="FFFFFF"/>
                 </a:solidFill>
               </a14:hiddenFill>
             </a:ext>
             <a:ext uri="{91240B29-F687-4F45-9708-019B960494DF}">
-              <a14:hiddenLine xmlns:a14="http://schemas.microsoft.com/office/drawing/2010/main" w="9525">
+              <a14:hiddenLine xmlns:a14="http://schemas.microsoft.com/office/drawing/2010/main" xmlns="" w="9525">
                 <a:solidFill>
                   <a:srgbClr val="000000"/>
                 </a:solidFill>
@@ -891,7 +893,7 @@
           <p:cNvPr id="34818" name="Rectangle 2">
             <a:extLst>
               <a:ext uri="{FF2B5EF4-FFF2-40B4-BE49-F238E27FC236}">
-                <a16:creationId xmlns:a16="http://schemas.microsoft.com/office/drawing/2014/main" id="{D19DD103-275F-46A0-BEB3-576DC18D62D7}"/>
+                <a16:creationId xmlns:a16="http://schemas.microsoft.com/office/drawing/2014/main" xmlns="" id="{D19DD103-275F-46A0-BEB3-576DC18D62D7}"/>
               </a:ext>
             </a:extLst>
           </p:cNvPr>
@@ -911,7 +913,7 @@
           <p:cNvPr id="34819" name="Rectangle 3">
             <a:extLst>
               <a:ext uri="{FF2B5EF4-FFF2-40B4-BE49-F238E27FC236}">
-                <a16:creationId xmlns:a16="http://schemas.microsoft.com/office/drawing/2014/main" id="{E9ADCDDC-7641-41D4-AAB2-2DC5DA9547F0}"/>
+                <a16:creationId xmlns:a16="http://schemas.microsoft.com/office/drawing/2014/main" xmlns="" id="{E9ADCDDC-7641-41D4-AAB2-2DC5DA9547F0}"/>
               </a:ext>
             </a:extLst>
           </p:cNvPr>
@@ -927,14 +929,14 @@
           <a:ln/>
           <a:extLst>
             <a:ext uri="{909E8E84-426E-40DD-AFC4-6F175D3DCCD1}">
-              <a14:hiddenFill xmlns:a14="http://schemas.microsoft.com/office/drawing/2010/main">
+              <a14:hiddenFill xmlns:a14="http://schemas.microsoft.com/office/drawing/2010/main" xmlns="">
                 <a:solidFill>
                   <a:srgbClr val="FFFFFF"/>
                 </a:solidFill>
               </a14:hiddenFill>
             </a:ext>
             <a:ext uri="{91240B29-F687-4F45-9708-019B960494DF}">
-              <a14:hiddenLine xmlns:a14="http://schemas.microsoft.com/office/drawing/2010/main" w="9525">
+              <a14:hiddenLine xmlns:a14="http://schemas.microsoft.com/office/drawing/2010/main" xmlns="" w="9525">
                 <a:solidFill>
                   <a:srgbClr val="000000"/>
                 </a:solidFill>
@@ -985,7 +987,7 @@
           <p:cNvPr id="36866" name="Rectangle 2">
             <a:extLst>
               <a:ext uri="{FF2B5EF4-FFF2-40B4-BE49-F238E27FC236}">
-                <a16:creationId xmlns:a16="http://schemas.microsoft.com/office/drawing/2014/main" id="{DFCFEC24-8D51-4AAB-8657-81C98775092E}"/>
+                <a16:creationId xmlns:a16="http://schemas.microsoft.com/office/drawing/2014/main" xmlns="" id="{DFCFEC24-8D51-4AAB-8657-81C98775092E}"/>
               </a:ext>
             </a:extLst>
           </p:cNvPr>
@@ -1005,7 +1007,7 @@
           <p:cNvPr id="36867" name="Rectangle 3">
             <a:extLst>
               <a:ext uri="{FF2B5EF4-FFF2-40B4-BE49-F238E27FC236}">
-                <a16:creationId xmlns:a16="http://schemas.microsoft.com/office/drawing/2014/main" id="{4FAB513B-E127-4650-9171-574B0AF722CF}"/>
+                <a16:creationId xmlns:a16="http://schemas.microsoft.com/office/drawing/2014/main" xmlns="" id="{4FAB513B-E127-4650-9171-574B0AF722CF}"/>
               </a:ext>
             </a:extLst>
           </p:cNvPr>
@@ -1021,14 +1023,14 @@
           <a:ln/>
           <a:extLst>
             <a:ext uri="{909E8E84-426E-40DD-AFC4-6F175D3DCCD1}">
-              <a14:hiddenFill xmlns:a14="http://schemas.microsoft.com/office/drawing/2010/main">
+              <a14:hiddenFill xmlns:a14="http://schemas.microsoft.com/office/drawing/2010/main" xmlns="">
                 <a:solidFill>
                   <a:srgbClr val="FFFFFF"/>
                 </a:solidFill>
               </a14:hiddenFill>
             </a:ext>
             <a:ext uri="{91240B29-F687-4F45-9708-019B960494DF}">
-              <a14:hiddenLine xmlns:a14="http://schemas.microsoft.com/office/drawing/2010/main" w="9525">
+              <a14:hiddenLine xmlns:a14="http://schemas.microsoft.com/office/drawing/2010/main" xmlns="" w="9525">
                 <a:solidFill>
                   <a:srgbClr val="000000"/>
                 </a:solidFill>
@@ -1079,7 +1081,7 @@
           <p:cNvPr id="40962" name="Rectangle 2">
             <a:extLst>
               <a:ext uri="{FF2B5EF4-FFF2-40B4-BE49-F238E27FC236}">
-                <a16:creationId xmlns:a16="http://schemas.microsoft.com/office/drawing/2014/main" id="{9EC96916-1BAE-4A4E-BF94-2604763DB990}"/>
+                <a16:creationId xmlns:a16="http://schemas.microsoft.com/office/drawing/2014/main" xmlns="" id="{9EC96916-1BAE-4A4E-BF94-2604763DB990}"/>
               </a:ext>
             </a:extLst>
           </p:cNvPr>
@@ -1099,7 +1101,7 @@
           <p:cNvPr id="40963" name="Rectangle 3">
             <a:extLst>
               <a:ext uri="{FF2B5EF4-FFF2-40B4-BE49-F238E27FC236}">
-                <a16:creationId xmlns:a16="http://schemas.microsoft.com/office/drawing/2014/main" id="{7FEBB5C8-282F-4906-80B9-C81D7016136F}"/>
+                <a16:creationId xmlns:a16="http://schemas.microsoft.com/office/drawing/2014/main" xmlns="" id="{7FEBB5C8-282F-4906-80B9-C81D7016136F}"/>
               </a:ext>
             </a:extLst>
           </p:cNvPr>
@@ -1115,14 +1117,14 @@
           <a:ln/>
           <a:extLst>
             <a:ext uri="{909E8E84-426E-40DD-AFC4-6F175D3DCCD1}">
-              <a14:hiddenFill xmlns:a14="http://schemas.microsoft.com/office/drawing/2010/main">
+              <a14:hiddenFill xmlns:a14="http://schemas.microsoft.com/office/drawing/2010/main" xmlns="">
                 <a:solidFill>
                   <a:srgbClr val="FFFFFF"/>
                 </a:solidFill>
               </a14:hiddenFill>
             </a:ext>
             <a:ext uri="{91240B29-F687-4F45-9708-019B960494DF}">
-              <a14:hiddenLine xmlns:a14="http://schemas.microsoft.com/office/drawing/2010/main" w="9525">
+              <a14:hiddenLine xmlns:a14="http://schemas.microsoft.com/office/drawing/2010/main" xmlns="" w="9525">
                 <a:solidFill>
                   <a:srgbClr val="000000"/>
                 </a:solidFill>
@@ -1173,7 +1175,7 @@
           <p:cNvPr id="43010" name="Rectangle 2">
             <a:extLst>
               <a:ext uri="{FF2B5EF4-FFF2-40B4-BE49-F238E27FC236}">
-                <a16:creationId xmlns:a16="http://schemas.microsoft.com/office/drawing/2014/main" id="{17605DEB-C81B-41F2-ABA8-D21CD717FA7A}"/>
+                <a16:creationId xmlns:a16="http://schemas.microsoft.com/office/drawing/2014/main" xmlns="" id="{17605DEB-C81B-41F2-ABA8-D21CD717FA7A}"/>
               </a:ext>
             </a:extLst>
           </p:cNvPr>
@@ -1193,7 +1195,7 @@
           <p:cNvPr id="43011" name="Rectangle 3">
             <a:extLst>
               <a:ext uri="{FF2B5EF4-FFF2-40B4-BE49-F238E27FC236}">
-                <a16:creationId xmlns:a16="http://schemas.microsoft.com/office/drawing/2014/main" id="{520811E7-D32E-4B74-9C5E-4F2EBBA715B3}"/>
+                <a16:creationId xmlns:a16="http://schemas.microsoft.com/office/drawing/2014/main" xmlns="" id="{520811E7-D32E-4B74-9C5E-4F2EBBA715B3}"/>
               </a:ext>
             </a:extLst>
           </p:cNvPr>
@@ -1209,14 +1211,14 @@
           <a:ln/>
           <a:extLst>
             <a:ext uri="{909E8E84-426E-40DD-AFC4-6F175D3DCCD1}">
-              <a14:hiddenFill xmlns:a14="http://schemas.microsoft.com/office/drawing/2010/main">
+              <a14:hiddenFill xmlns:a14="http://schemas.microsoft.com/office/drawing/2010/main" xmlns="">
                 <a:solidFill>
                   <a:srgbClr val="FFFFFF"/>
                 </a:solidFill>
               </a14:hiddenFill>
             </a:ext>
             <a:ext uri="{91240B29-F687-4F45-9708-019B960494DF}">
-              <a14:hiddenLine xmlns:a14="http://schemas.microsoft.com/office/drawing/2010/main" w="9525">
+              <a14:hiddenLine xmlns:a14="http://schemas.microsoft.com/office/drawing/2010/main" xmlns="" w="9525">
                 <a:solidFill>
                   <a:srgbClr val="000000"/>
                 </a:solidFill>
@@ -1267,7 +1269,7 @@
           <p:cNvPr id="47106" name="Rectangle 2">
             <a:extLst>
               <a:ext uri="{FF2B5EF4-FFF2-40B4-BE49-F238E27FC236}">
-                <a16:creationId xmlns:a16="http://schemas.microsoft.com/office/drawing/2014/main" id="{CADFF460-F732-4F8E-9BEC-BDC62B69C0FD}"/>
+                <a16:creationId xmlns:a16="http://schemas.microsoft.com/office/drawing/2014/main" xmlns="" id="{CADFF460-F732-4F8E-9BEC-BDC62B69C0FD}"/>
               </a:ext>
             </a:extLst>
           </p:cNvPr>
@@ -1287,7 +1289,7 @@
           <p:cNvPr id="47107" name="Rectangle 3">
             <a:extLst>
               <a:ext uri="{FF2B5EF4-FFF2-40B4-BE49-F238E27FC236}">
-                <a16:creationId xmlns:a16="http://schemas.microsoft.com/office/drawing/2014/main" id="{E427A0BF-8535-41FD-9918-F0C0C2585CDF}"/>
+                <a16:creationId xmlns:a16="http://schemas.microsoft.com/office/drawing/2014/main" xmlns="" id="{E427A0BF-8535-41FD-9918-F0C0C2585CDF}"/>
               </a:ext>
             </a:extLst>
           </p:cNvPr>
@@ -1303,14 +1305,14 @@
           <a:ln/>
           <a:extLst>
             <a:ext uri="{909E8E84-426E-40DD-AFC4-6F175D3DCCD1}">
-              <a14:hiddenFill xmlns:a14="http://schemas.microsoft.com/office/drawing/2010/main">
+              <a14:hiddenFill xmlns:a14="http://schemas.microsoft.com/office/drawing/2010/main" xmlns="">
                 <a:solidFill>
                   <a:srgbClr val="FFFFFF"/>
                 </a:solidFill>
               </a14:hiddenFill>
             </a:ext>
             <a:ext uri="{91240B29-F687-4F45-9708-019B960494DF}">
-              <a14:hiddenLine xmlns:a14="http://schemas.microsoft.com/office/drawing/2010/main" w="9525">
+              <a14:hiddenLine xmlns:a14="http://schemas.microsoft.com/office/drawing/2010/main" xmlns="" w="9525">
                 <a:solidFill>
                   <a:srgbClr val="000000"/>
                 </a:solidFill>
@@ -1361,7 +1363,7 @@
           <p:cNvPr id="45058" name="Rectangle 2">
             <a:extLst>
               <a:ext uri="{FF2B5EF4-FFF2-40B4-BE49-F238E27FC236}">
-                <a16:creationId xmlns:a16="http://schemas.microsoft.com/office/drawing/2014/main" id="{297FF49F-1D45-469B-875E-F2DC1DDA4D36}"/>
+                <a16:creationId xmlns:a16="http://schemas.microsoft.com/office/drawing/2014/main" xmlns="" id="{297FF49F-1D45-469B-875E-F2DC1DDA4D36}"/>
               </a:ext>
             </a:extLst>
           </p:cNvPr>
@@ -1381,7 +1383,7 @@
           <p:cNvPr id="45059" name="Rectangle 3">
             <a:extLst>
               <a:ext uri="{FF2B5EF4-FFF2-40B4-BE49-F238E27FC236}">
-                <a16:creationId xmlns:a16="http://schemas.microsoft.com/office/drawing/2014/main" id="{949FD0D0-FC60-49A7-A825-489FF222CA57}"/>
+                <a16:creationId xmlns:a16="http://schemas.microsoft.com/office/drawing/2014/main" xmlns="" id="{949FD0D0-FC60-49A7-A825-489FF222CA57}"/>
               </a:ext>
             </a:extLst>
           </p:cNvPr>
@@ -1397,14 +1399,14 @@
           <a:ln/>
           <a:extLst>
             <a:ext uri="{909E8E84-426E-40DD-AFC4-6F175D3DCCD1}">
-              <a14:hiddenFill xmlns:a14="http://schemas.microsoft.com/office/drawing/2010/main">
+              <a14:hiddenFill xmlns:a14="http://schemas.microsoft.com/office/drawing/2010/main" xmlns="">
                 <a:solidFill>
                   <a:srgbClr val="FFFFFF"/>
                 </a:solidFill>
               </a14:hiddenFill>
             </a:ext>
             <a:ext uri="{91240B29-F687-4F45-9708-019B960494DF}">
-              <a14:hiddenLine xmlns:a14="http://schemas.microsoft.com/office/drawing/2010/main" w="9525">
+              <a14:hiddenLine xmlns:a14="http://schemas.microsoft.com/office/drawing/2010/main" xmlns="" w="9525">
                 <a:solidFill>
                   <a:srgbClr val="000000"/>
                 </a:solidFill>
@@ -1428,7 +1430,7 @@
     </p:spTree>
     <p:extLst>
       <p:ext uri="{BB962C8B-B14F-4D97-AF65-F5344CB8AC3E}">
-        <p14:creationId xmlns:p14="http://schemas.microsoft.com/office/powerpoint/2010/main" val="920606086"/>
+        <p14:creationId xmlns:p14="http://schemas.microsoft.com/office/powerpoint/2010/main" xmlns="" val="920606086"/>
       </p:ext>
     </p:extLst>
   </p:cSld>
@@ -1460,7 +1462,7 @@
           <p:cNvPr id="49154" name="Rectangle 2">
             <a:extLst>
               <a:ext uri="{FF2B5EF4-FFF2-40B4-BE49-F238E27FC236}">
-                <a16:creationId xmlns:a16="http://schemas.microsoft.com/office/drawing/2014/main" id="{36C03FFC-61A1-4E2B-BB58-CEF8239A9776}"/>
+                <a16:creationId xmlns:a16="http://schemas.microsoft.com/office/drawing/2014/main" xmlns="" id="{36C03FFC-61A1-4E2B-BB58-CEF8239A9776}"/>
               </a:ext>
             </a:extLst>
           </p:cNvPr>
@@ -1480,7 +1482,7 @@
           <p:cNvPr id="49155" name="Rectangle 3">
             <a:extLst>
               <a:ext uri="{FF2B5EF4-FFF2-40B4-BE49-F238E27FC236}">
-                <a16:creationId xmlns:a16="http://schemas.microsoft.com/office/drawing/2014/main" id="{E1C4ACA0-7908-4D31-AF21-00AD91730D97}"/>
+                <a16:creationId xmlns:a16="http://schemas.microsoft.com/office/drawing/2014/main" xmlns="" id="{E1C4ACA0-7908-4D31-AF21-00AD91730D97}"/>
               </a:ext>
             </a:extLst>
           </p:cNvPr>
@@ -1496,14 +1498,14 @@
           <a:ln/>
           <a:extLst>
             <a:ext uri="{909E8E84-426E-40DD-AFC4-6F175D3DCCD1}">
-              <a14:hiddenFill xmlns:a14="http://schemas.microsoft.com/office/drawing/2010/main">
+              <a14:hiddenFill xmlns:a14="http://schemas.microsoft.com/office/drawing/2010/main" xmlns="">
                 <a:solidFill>
                   <a:srgbClr val="FFFFFF"/>
                 </a:solidFill>
               </a14:hiddenFill>
             </a:ext>
             <a:ext uri="{91240B29-F687-4F45-9708-019B960494DF}">
-              <a14:hiddenLine xmlns:a14="http://schemas.microsoft.com/office/drawing/2010/main" w="9525">
+              <a14:hiddenLine xmlns:a14="http://schemas.microsoft.com/office/drawing/2010/main" xmlns="" w="9525">
                 <a:solidFill>
                   <a:srgbClr val="000000"/>
                 </a:solidFill>
@@ -1554,7 +1556,7 @@
           <p:cNvPr id="10242" name="Rectangle 2">
             <a:extLst>
               <a:ext uri="{FF2B5EF4-FFF2-40B4-BE49-F238E27FC236}">
-                <a16:creationId xmlns:a16="http://schemas.microsoft.com/office/drawing/2014/main" id="{FBCFB357-A457-418B-BC82-12A779287133}"/>
+                <a16:creationId xmlns:a16="http://schemas.microsoft.com/office/drawing/2014/main" xmlns="" id="{FBCFB357-A457-418B-BC82-12A779287133}"/>
               </a:ext>
             </a:extLst>
           </p:cNvPr>
@@ -1574,7 +1576,7 @@
           <p:cNvPr id="10243" name="Rectangle 3">
             <a:extLst>
               <a:ext uri="{FF2B5EF4-FFF2-40B4-BE49-F238E27FC236}">
-                <a16:creationId xmlns:a16="http://schemas.microsoft.com/office/drawing/2014/main" id="{4AC72817-56C5-4C77-BF6F-D63723000CCB}"/>
+                <a16:creationId xmlns:a16="http://schemas.microsoft.com/office/drawing/2014/main" xmlns="" id="{4AC72817-56C5-4C77-BF6F-D63723000CCB}"/>
               </a:ext>
             </a:extLst>
           </p:cNvPr>
@@ -1590,14 +1592,14 @@
           <a:ln/>
           <a:extLst>
             <a:ext uri="{909E8E84-426E-40DD-AFC4-6F175D3DCCD1}">
-              <a14:hiddenFill xmlns:a14="http://schemas.microsoft.com/office/drawing/2010/main">
+              <a14:hiddenFill xmlns:a14="http://schemas.microsoft.com/office/drawing/2010/main" xmlns="">
                 <a:solidFill>
                   <a:srgbClr val="FFFFFF"/>
                 </a:solidFill>
               </a14:hiddenFill>
             </a:ext>
             <a:ext uri="{91240B29-F687-4F45-9708-019B960494DF}">
-              <a14:hiddenLine xmlns:a14="http://schemas.microsoft.com/office/drawing/2010/main" w="9525">
+              <a14:hiddenLine xmlns:a14="http://schemas.microsoft.com/office/drawing/2010/main" xmlns="" w="9525">
                 <a:solidFill>
                   <a:srgbClr val="000000"/>
                 </a:solidFill>
@@ -1648,7 +1650,7 @@
           <p:cNvPr id="51202" name="Rectangle 2">
             <a:extLst>
               <a:ext uri="{FF2B5EF4-FFF2-40B4-BE49-F238E27FC236}">
-                <a16:creationId xmlns:a16="http://schemas.microsoft.com/office/drawing/2014/main" id="{74A77185-263F-40EF-B517-050039163EBF}"/>
+                <a16:creationId xmlns:a16="http://schemas.microsoft.com/office/drawing/2014/main" xmlns="" id="{74A77185-263F-40EF-B517-050039163EBF}"/>
               </a:ext>
             </a:extLst>
           </p:cNvPr>
@@ -1668,7 +1670,7 @@
           <p:cNvPr id="51203" name="Rectangle 3">
             <a:extLst>
               <a:ext uri="{FF2B5EF4-FFF2-40B4-BE49-F238E27FC236}">
-                <a16:creationId xmlns:a16="http://schemas.microsoft.com/office/drawing/2014/main" id="{93895C72-BFF8-4918-95C2-8FFB7A879F7A}"/>
+                <a16:creationId xmlns:a16="http://schemas.microsoft.com/office/drawing/2014/main" xmlns="" id="{93895C72-BFF8-4918-95C2-8FFB7A879F7A}"/>
               </a:ext>
             </a:extLst>
           </p:cNvPr>
@@ -1684,14 +1686,14 @@
           <a:ln/>
           <a:extLst>
             <a:ext uri="{909E8E84-426E-40DD-AFC4-6F175D3DCCD1}">
-              <a14:hiddenFill xmlns:a14="http://schemas.microsoft.com/office/drawing/2010/main">
+              <a14:hiddenFill xmlns:a14="http://schemas.microsoft.com/office/drawing/2010/main" xmlns="">
                 <a:solidFill>
                   <a:srgbClr val="FFFFFF"/>
                 </a:solidFill>
               </a14:hiddenFill>
             </a:ext>
             <a:ext uri="{91240B29-F687-4F45-9708-019B960494DF}">
-              <a14:hiddenLine xmlns:a14="http://schemas.microsoft.com/office/drawing/2010/main" w="9525">
+              <a14:hiddenLine xmlns:a14="http://schemas.microsoft.com/office/drawing/2010/main" xmlns="" w="9525">
                 <a:solidFill>
                   <a:srgbClr val="000000"/>
                 </a:solidFill>
@@ -1739,10 +1741,10 @@
       </p:grpSpPr>
       <p:sp>
         <p:nvSpPr>
-          <p:cNvPr id="53250" name="Rectangle 2">
-            <a:extLst>
-              <a:ext uri="{FF2B5EF4-FFF2-40B4-BE49-F238E27FC236}">
-                <a16:creationId xmlns:a16="http://schemas.microsoft.com/office/drawing/2014/main" id="{599F2A1A-F415-4861-9317-8DF50F438DE9}"/>
+          <p:cNvPr id="55298" name="Rectangle 2">
+            <a:extLst>
+              <a:ext uri="{FF2B5EF4-FFF2-40B4-BE49-F238E27FC236}">
+                <a16:creationId xmlns:a16="http://schemas.microsoft.com/office/drawing/2014/main" xmlns="" id="{03A7F482-09C8-4234-BA8B-E06C784513B0}"/>
               </a:ext>
             </a:extLst>
           </p:cNvPr>
@@ -1759,10 +1761,10 @@
       </p:sp>
       <p:sp>
         <p:nvSpPr>
-          <p:cNvPr id="53251" name="Rectangle 3">
-            <a:extLst>
-              <a:ext uri="{FF2B5EF4-FFF2-40B4-BE49-F238E27FC236}">
-                <a16:creationId xmlns:a16="http://schemas.microsoft.com/office/drawing/2014/main" id="{68EDBADE-A031-473C-85B2-8404A6820023}"/>
+          <p:cNvPr id="55299" name="Rectangle 3">
+            <a:extLst>
+              <a:ext uri="{FF2B5EF4-FFF2-40B4-BE49-F238E27FC236}">
+                <a16:creationId xmlns:a16="http://schemas.microsoft.com/office/drawing/2014/main" xmlns="" id="{F97F5174-3BAF-4B1B-846E-3DB7430B29F8}"/>
               </a:ext>
             </a:extLst>
           </p:cNvPr>
@@ -1778,14 +1780,14 @@
           <a:ln/>
           <a:extLst>
             <a:ext uri="{909E8E84-426E-40DD-AFC4-6F175D3DCCD1}">
-              <a14:hiddenFill xmlns:a14="http://schemas.microsoft.com/office/drawing/2010/main">
+              <a14:hiddenFill xmlns:a14="http://schemas.microsoft.com/office/drawing/2010/main" xmlns="">
                 <a:solidFill>
                   <a:srgbClr val="FFFFFF"/>
                 </a:solidFill>
               </a14:hiddenFill>
             </a:ext>
             <a:ext uri="{91240B29-F687-4F45-9708-019B960494DF}">
-              <a14:hiddenLine xmlns:a14="http://schemas.microsoft.com/office/drawing/2010/main" w="9525">
+              <a14:hiddenLine xmlns:a14="http://schemas.microsoft.com/office/drawing/2010/main" xmlns="" w="9525">
                 <a:solidFill>
                   <a:srgbClr val="000000"/>
                 </a:solidFill>
@@ -1833,10 +1835,10 @@
       </p:grpSpPr>
       <p:sp>
         <p:nvSpPr>
-          <p:cNvPr id="55298" name="Rectangle 2">
-            <a:extLst>
-              <a:ext uri="{FF2B5EF4-FFF2-40B4-BE49-F238E27FC236}">
-                <a16:creationId xmlns:a16="http://schemas.microsoft.com/office/drawing/2014/main" id="{03A7F482-09C8-4234-BA8B-E06C784513B0}"/>
+          <p:cNvPr id="53250" name="Rectangle 2">
+            <a:extLst>
+              <a:ext uri="{FF2B5EF4-FFF2-40B4-BE49-F238E27FC236}">
+                <a16:creationId xmlns:a16="http://schemas.microsoft.com/office/drawing/2014/main" xmlns="" id="{599F2A1A-F415-4861-9317-8DF50F438DE9}"/>
               </a:ext>
             </a:extLst>
           </p:cNvPr>
@@ -1853,10 +1855,10 @@
       </p:sp>
       <p:sp>
         <p:nvSpPr>
-          <p:cNvPr id="55299" name="Rectangle 3">
-            <a:extLst>
-              <a:ext uri="{FF2B5EF4-FFF2-40B4-BE49-F238E27FC236}">
-                <a16:creationId xmlns:a16="http://schemas.microsoft.com/office/drawing/2014/main" id="{F97F5174-3BAF-4B1B-846E-3DB7430B29F8}"/>
+          <p:cNvPr id="53251" name="Rectangle 3">
+            <a:extLst>
+              <a:ext uri="{FF2B5EF4-FFF2-40B4-BE49-F238E27FC236}">
+                <a16:creationId xmlns:a16="http://schemas.microsoft.com/office/drawing/2014/main" xmlns="" id="{68EDBADE-A031-473C-85B2-8404A6820023}"/>
               </a:ext>
             </a:extLst>
           </p:cNvPr>
@@ -1872,14 +1874,14 @@
           <a:ln/>
           <a:extLst>
             <a:ext uri="{909E8E84-426E-40DD-AFC4-6F175D3DCCD1}">
-              <a14:hiddenFill xmlns:a14="http://schemas.microsoft.com/office/drawing/2010/main">
+              <a14:hiddenFill xmlns:a14="http://schemas.microsoft.com/office/drawing/2010/main" xmlns="">
                 <a:solidFill>
                   <a:srgbClr val="FFFFFF"/>
                 </a:solidFill>
               </a14:hiddenFill>
             </a:ext>
             <a:ext uri="{91240B29-F687-4F45-9708-019B960494DF}">
-              <a14:hiddenLine xmlns:a14="http://schemas.microsoft.com/office/drawing/2010/main" w="9525">
+              <a14:hiddenLine xmlns:a14="http://schemas.microsoft.com/office/drawing/2010/main" xmlns="" w="9525">
                 <a:solidFill>
                   <a:srgbClr val="000000"/>
                 </a:solidFill>
@@ -1930,7 +1932,7 @@
           <p:cNvPr id="58370" name="Rectangle 2">
             <a:extLst>
               <a:ext uri="{FF2B5EF4-FFF2-40B4-BE49-F238E27FC236}">
-                <a16:creationId xmlns:a16="http://schemas.microsoft.com/office/drawing/2014/main" id="{46F678B6-0AFA-4070-84E8-E0DDD2DCB293}"/>
+                <a16:creationId xmlns:a16="http://schemas.microsoft.com/office/drawing/2014/main" xmlns="" id="{46F678B6-0AFA-4070-84E8-E0DDD2DCB293}"/>
               </a:ext>
             </a:extLst>
           </p:cNvPr>
@@ -1950,7 +1952,7 @@
           <p:cNvPr id="58371" name="Rectangle 3">
             <a:extLst>
               <a:ext uri="{FF2B5EF4-FFF2-40B4-BE49-F238E27FC236}">
-                <a16:creationId xmlns:a16="http://schemas.microsoft.com/office/drawing/2014/main" id="{607DE2B4-6350-4A16-8897-F8F2804C1A8F}"/>
+                <a16:creationId xmlns:a16="http://schemas.microsoft.com/office/drawing/2014/main" xmlns="" id="{607DE2B4-6350-4A16-8897-F8F2804C1A8F}"/>
               </a:ext>
             </a:extLst>
           </p:cNvPr>
@@ -1966,14 +1968,14 @@
           <a:ln/>
           <a:extLst>
             <a:ext uri="{909E8E84-426E-40DD-AFC4-6F175D3DCCD1}">
-              <a14:hiddenFill xmlns:a14="http://schemas.microsoft.com/office/drawing/2010/main">
+              <a14:hiddenFill xmlns:a14="http://schemas.microsoft.com/office/drawing/2010/main" xmlns="">
                 <a:solidFill>
                   <a:srgbClr val="FFFFFF"/>
                 </a:solidFill>
               </a14:hiddenFill>
             </a:ext>
             <a:ext uri="{91240B29-F687-4F45-9708-019B960494DF}">
-              <a14:hiddenLine xmlns:a14="http://schemas.microsoft.com/office/drawing/2010/main" w="9525">
+              <a14:hiddenLine xmlns:a14="http://schemas.microsoft.com/office/drawing/2010/main" xmlns="" w="9525">
                 <a:solidFill>
                   <a:srgbClr val="000000"/>
                 </a:solidFill>
@@ -2024,7 +2026,7 @@
           <p:cNvPr id="60418" name="Rectangle 2">
             <a:extLst>
               <a:ext uri="{FF2B5EF4-FFF2-40B4-BE49-F238E27FC236}">
-                <a16:creationId xmlns:a16="http://schemas.microsoft.com/office/drawing/2014/main" id="{B8301404-D876-4FA9-9859-EB43354FAFAE}"/>
+                <a16:creationId xmlns:a16="http://schemas.microsoft.com/office/drawing/2014/main" xmlns="" id="{B8301404-D876-4FA9-9859-EB43354FAFAE}"/>
               </a:ext>
             </a:extLst>
           </p:cNvPr>
@@ -2044,7 +2046,7 @@
           <p:cNvPr id="60419" name="Rectangle 3">
             <a:extLst>
               <a:ext uri="{FF2B5EF4-FFF2-40B4-BE49-F238E27FC236}">
-                <a16:creationId xmlns:a16="http://schemas.microsoft.com/office/drawing/2014/main" id="{EB83674B-F150-4C3E-831A-26B553169AEE}"/>
+                <a16:creationId xmlns:a16="http://schemas.microsoft.com/office/drawing/2014/main" xmlns="" id="{EB83674B-F150-4C3E-831A-26B553169AEE}"/>
               </a:ext>
             </a:extLst>
           </p:cNvPr>
@@ -2060,14 +2062,14 @@
           <a:ln/>
           <a:extLst>
             <a:ext uri="{909E8E84-426E-40DD-AFC4-6F175D3DCCD1}">
-              <a14:hiddenFill xmlns:a14="http://schemas.microsoft.com/office/drawing/2010/main">
+              <a14:hiddenFill xmlns:a14="http://schemas.microsoft.com/office/drawing/2010/main" xmlns="">
                 <a:solidFill>
                   <a:srgbClr val="FFFFFF"/>
                 </a:solidFill>
               </a14:hiddenFill>
             </a:ext>
             <a:ext uri="{91240B29-F687-4F45-9708-019B960494DF}">
-              <a14:hiddenLine xmlns:a14="http://schemas.microsoft.com/office/drawing/2010/main" w="9525">
+              <a14:hiddenLine xmlns:a14="http://schemas.microsoft.com/office/drawing/2010/main" xmlns="" w="9525">
                 <a:solidFill>
                   <a:srgbClr val="000000"/>
                 </a:solidFill>
@@ -2118,7 +2120,7 @@
           <p:cNvPr id="62466" name="Rectangle 2">
             <a:extLst>
               <a:ext uri="{FF2B5EF4-FFF2-40B4-BE49-F238E27FC236}">
-                <a16:creationId xmlns:a16="http://schemas.microsoft.com/office/drawing/2014/main" id="{34F8BBD9-185E-425D-9763-2A1219F950A1}"/>
+                <a16:creationId xmlns:a16="http://schemas.microsoft.com/office/drawing/2014/main" xmlns="" id="{34F8BBD9-185E-425D-9763-2A1219F950A1}"/>
               </a:ext>
             </a:extLst>
           </p:cNvPr>
@@ -2138,7 +2140,7 @@
           <p:cNvPr id="62467" name="Rectangle 3">
             <a:extLst>
               <a:ext uri="{FF2B5EF4-FFF2-40B4-BE49-F238E27FC236}">
-                <a16:creationId xmlns:a16="http://schemas.microsoft.com/office/drawing/2014/main" id="{C11B4F24-2CE2-4D89-BDF4-88019FD32B7B}"/>
+                <a16:creationId xmlns:a16="http://schemas.microsoft.com/office/drawing/2014/main" xmlns="" id="{C11B4F24-2CE2-4D89-BDF4-88019FD32B7B}"/>
               </a:ext>
             </a:extLst>
           </p:cNvPr>
@@ -2154,14 +2156,14 @@
           <a:ln/>
           <a:extLst>
             <a:ext uri="{909E8E84-426E-40DD-AFC4-6F175D3DCCD1}">
-              <a14:hiddenFill xmlns:a14="http://schemas.microsoft.com/office/drawing/2010/main">
+              <a14:hiddenFill xmlns:a14="http://schemas.microsoft.com/office/drawing/2010/main" xmlns="">
                 <a:solidFill>
                   <a:srgbClr val="FFFFFF"/>
                 </a:solidFill>
               </a14:hiddenFill>
             </a:ext>
             <a:ext uri="{91240B29-F687-4F45-9708-019B960494DF}">
-              <a14:hiddenLine xmlns:a14="http://schemas.microsoft.com/office/drawing/2010/main" w="9525">
+              <a14:hiddenLine xmlns:a14="http://schemas.microsoft.com/office/drawing/2010/main" xmlns="" w="9525">
                 <a:solidFill>
                   <a:srgbClr val="000000"/>
                 </a:solidFill>
@@ -2212,7 +2214,7 @@
           <p:cNvPr id="12290" name="Rectangle 2">
             <a:extLst>
               <a:ext uri="{FF2B5EF4-FFF2-40B4-BE49-F238E27FC236}">
-                <a16:creationId xmlns:a16="http://schemas.microsoft.com/office/drawing/2014/main" id="{4730F164-3563-441D-A2BB-9ECF873C6BAE}"/>
+                <a16:creationId xmlns:a16="http://schemas.microsoft.com/office/drawing/2014/main" xmlns="" id="{4730F164-3563-441D-A2BB-9ECF873C6BAE}"/>
               </a:ext>
             </a:extLst>
           </p:cNvPr>
@@ -2232,7 +2234,7 @@
           <p:cNvPr id="12291" name="Rectangle 3">
             <a:extLst>
               <a:ext uri="{FF2B5EF4-FFF2-40B4-BE49-F238E27FC236}">
-                <a16:creationId xmlns:a16="http://schemas.microsoft.com/office/drawing/2014/main" id="{58081F0E-1362-4F6F-BE70-E88D6BFB0B58}"/>
+                <a16:creationId xmlns:a16="http://schemas.microsoft.com/office/drawing/2014/main" xmlns="" id="{58081F0E-1362-4F6F-BE70-E88D6BFB0B58}"/>
               </a:ext>
             </a:extLst>
           </p:cNvPr>
@@ -2248,14 +2250,14 @@
           <a:ln/>
           <a:extLst>
             <a:ext uri="{909E8E84-426E-40DD-AFC4-6F175D3DCCD1}">
-              <a14:hiddenFill xmlns:a14="http://schemas.microsoft.com/office/drawing/2010/main">
+              <a14:hiddenFill xmlns:a14="http://schemas.microsoft.com/office/drawing/2010/main" xmlns="">
                 <a:solidFill>
                   <a:srgbClr val="FFFFFF"/>
                 </a:solidFill>
               </a14:hiddenFill>
             </a:ext>
             <a:ext uri="{91240B29-F687-4F45-9708-019B960494DF}">
-              <a14:hiddenLine xmlns:a14="http://schemas.microsoft.com/office/drawing/2010/main" w="9525">
+              <a14:hiddenLine xmlns:a14="http://schemas.microsoft.com/office/drawing/2010/main" xmlns="" w="9525">
                 <a:solidFill>
                   <a:srgbClr val="000000"/>
                 </a:solidFill>
@@ -2306,7 +2308,7 @@
           <p:cNvPr id="14338" name="Rectangle 2">
             <a:extLst>
               <a:ext uri="{FF2B5EF4-FFF2-40B4-BE49-F238E27FC236}">
-                <a16:creationId xmlns:a16="http://schemas.microsoft.com/office/drawing/2014/main" id="{CFB97593-0041-4772-A59B-E780BE22DF40}"/>
+                <a16:creationId xmlns:a16="http://schemas.microsoft.com/office/drawing/2014/main" xmlns="" id="{CFB97593-0041-4772-A59B-E780BE22DF40}"/>
               </a:ext>
             </a:extLst>
           </p:cNvPr>
@@ -2326,7 +2328,7 @@
           <p:cNvPr id="14339" name="Rectangle 3">
             <a:extLst>
               <a:ext uri="{FF2B5EF4-FFF2-40B4-BE49-F238E27FC236}">
-                <a16:creationId xmlns:a16="http://schemas.microsoft.com/office/drawing/2014/main" id="{677EF500-B7A4-4BC7-84F3-DC9FCA5B575F}"/>
+                <a16:creationId xmlns:a16="http://schemas.microsoft.com/office/drawing/2014/main" xmlns="" id="{677EF500-B7A4-4BC7-84F3-DC9FCA5B575F}"/>
               </a:ext>
             </a:extLst>
           </p:cNvPr>
@@ -2342,14 +2344,14 @@
           <a:ln/>
           <a:extLst>
             <a:ext uri="{909E8E84-426E-40DD-AFC4-6F175D3DCCD1}">
-              <a14:hiddenFill xmlns:a14="http://schemas.microsoft.com/office/drawing/2010/main">
+              <a14:hiddenFill xmlns:a14="http://schemas.microsoft.com/office/drawing/2010/main" xmlns="">
                 <a:solidFill>
                   <a:srgbClr val="FFFFFF"/>
                 </a:solidFill>
               </a14:hiddenFill>
             </a:ext>
             <a:ext uri="{91240B29-F687-4F45-9708-019B960494DF}">
-              <a14:hiddenLine xmlns:a14="http://schemas.microsoft.com/office/drawing/2010/main" w="9525">
+              <a14:hiddenLine xmlns:a14="http://schemas.microsoft.com/office/drawing/2010/main" xmlns="" w="9525">
                 <a:solidFill>
                   <a:srgbClr val="000000"/>
                 </a:solidFill>
@@ -2400,7 +2402,7 @@
           <p:cNvPr id="16386" name="Rectangle 2">
             <a:extLst>
               <a:ext uri="{FF2B5EF4-FFF2-40B4-BE49-F238E27FC236}">
-                <a16:creationId xmlns:a16="http://schemas.microsoft.com/office/drawing/2014/main" id="{655D7E6C-E4BC-4E16-83B1-ED424A35489A}"/>
+                <a16:creationId xmlns:a16="http://schemas.microsoft.com/office/drawing/2014/main" xmlns="" id="{655D7E6C-E4BC-4E16-83B1-ED424A35489A}"/>
               </a:ext>
             </a:extLst>
           </p:cNvPr>
@@ -2420,7 +2422,7 @@
           <p:cNvPr id="16387" name="Rectangle 3">
             <a:extLst>
               <a:ext uri="{FF2B5EF4-FFF2-40B4-BE49-F238E27FC236}">
-                <a16:creationId xmlns:a16="http://schemas.microsoft.com/office/drawing/2014/main" id="{96D47F81-B4E3-449F-BAFA-037C27364614}"/>
+                <a16:creationId xmlns:a16="http://schemas.microsoft.com/office/drawing/2014/main" xmlns="" id="{96D47F81-B4E3-449F-BAFA-037C27364614}"/>
               </a:ext>
             </a:extLst>
           </p:cNvPr>
@@ -2436,14 +2438,14 @@
           <a:ln/>
           <a:extLst>
             <a:ext uri="{909E8E84-426E-40DD-AFC4-6F175D3DCCD1}">
-              <a14:hiddenFill xmlns:a14="http://schemas.microsoft.com/office/drawing/2010/main">
+              <a14:hiddenFill xmlns:a14="http://schemas.microsoft.com/office/drawing/2010/main" xmlns="">
                 <a:solidFill>
                   <a:srgbClr val="FFFFFF"/>
                 </a:solidFill>
               </a14:hiddenFill>
             </a:ext>
             <a:ext uri="{91240B29-F687-4F45-9708-019B960494DF}">
-              <a14:hiddenLine xmlns:a14="http://schemas.microsoft.com/office/drawing/2010/main" w="9525">
+              <a14:hiddenLine xmlns:a14="http://schemas.microsoft.com/office/drawing/2010/main" xmlns="" w="9525">
                 <a:solidFill>
                   <a:srgbClr val="000000"/>
                 </a:solidFill>
@@ -2494,7 +2496,7 @@
           <p:cNvPr id="19458" name="Rectangle 2">
             <a:extLst>
               <a:ext uri="{FF2B5EF4-FFF2-40B4-BE49-F238E27FC236}">
-                <a16:creationId xmlns:a16="http://schemas.microsoft.com/office/drawing/2014/main" id="{A9F52C5D-9955-47A2-9EA6-38FEB66EF379}"/>
+                <a16:creationId xmlns:a16="http://schemas.microsoft.com/office/drawing/2014/main" xmlns="" id="{A9F52C5D-9955-47A2-9EA6-38FEB66EF379}"/>
               </a:ext>
             </a:extLst>
           </p:cNvPr>
@@ -2514,7 +2516,7 @@
           <p:cNvPr id="19459" name="Rectangle 3">
             <a:extLst>
               <a:ext uri="{FF2B5EF4-FFF2-40B4-BE49-F238E27FC236}">
-                <a16:creationId xmlns:a16="http://schemas.microsoft.com/office/drawing/2014/main" id="{E6218432-9C5A-4AD0-9E05-B779659723CC}"/>
+                <a16:creationId xmlns:a16="http://schemas.microsoft.com/office/drawing/2014/main" xmlns="" id="{E6218432-9C5A-4AD0-9E05-B779659723CC}"/>
               </a:ext>
             </a:extLst>
           </p:cNvPr>
@@ -2530,14 +2532,14 @@
           <a:ln/>
           <a:extLst>
             <a:ext uri="{909E8E84-426E-40DD-AFC4-6F175D3DCCD1}">
-              <a14:hiddenFill xmlns:a14="http://schemas.microsoft.com/office/drawing/2010/main">
+              <a14:hiddenFill xmlns:a14="http://schemas.microsoft.com/office/drawing/2010/main" xmlns="">
                 <a:solidFill>
                   <a:srgbClr val="FFFFFF"/>
                 </a:solidFill>
               </a14:hiddenFill>
             </a:ext>
             <a:ext uri="{91240B29-F687-4F45-9708-019B960494DF}">
-              <a14:hiddenLine xmlns:a14="http://schemas.microsoft.com/office/drawing/2010/main" w="9525">
+              <a14:hiddenLine xmlns:a14="http://schemas.microsoft.com/office/drawing/2010/main" xmlns="" w="9525">
                 <a:solidFill>
                   <a:srgbClr val="000000"/>
                 </a:solidFill>
@@ -2588,7 +2590,7 @@
           <p:cNvPr id="21506" name="Rectangle 2">
             <a:extLst>
               <a:ext uri="{FF2B5EF4-FFF2-40B4-BE49-F238E27FC236}">
-                <a16:creationId xmlns:a16="http://schemas.microsoft.com/office/drawing/2014/main" id="{042EA566-EA1E-431B-9110-DD679A87E3A9}"/>
+                <a16:creationId xmlns:a16="http://schemas.microsoft.com/office/drawing/2014/main" xmlns="" id="{042EA566-EA1E-431B-9110-DD679A87E3A9}"/>
               </a:ext>
             </a:extLst>
           </p:cNvPr>
@@ -2608,7 +2610,7 @@
           <p:cNvPr id="21507" name="Rectangle 3">
             <a:extLst>
               <a:ext uri="{FF2B5EF4-FFF2-40B4-BE49-F238E27FC236}">
-                <a16:creationId xmlns:a16="http://schemas.microsoft.com/office/drawing/2014/main" id="{1C1B7D9C-8A76-4C14-A850-8C9DC9F5D5F8}"/>
+                <a16:creationId xmlns:a16="http://schemas.microsoft.com/office/drawing/2014/main" xmlns="" id="{1C1B7D9C-8A76-4C14-A850-8C9DC9F5D5F8}"/>
               </a:ext>
             </a:extLst>
           </p:cNvPr>
@@ -2624,14 +2626,14 @@
           <a:ln/>
           <a:extLst>
             <a:ext uri="{909E8E84-426E-40DD-AFC4-6F175D3DCCD1}">
-              <a14:hiddenFill xmlns:a14="http://schemas.microsoft.com/office/drawing/2010/main">
+              <a14:hiddenFill xmlns:a14="http://schemas.microsoft.com/office/drawing/2010/main" xmlns="">
                 <a:solidFill>
                   <a:srgbClr val="FFFFFF"/>
                 </a:solidFill>
               </a14:hiddenFill>
             </a:ext>
             <a:ext uri="{91240B29-F687-4F45-9708-019B960494DF}">
-              <a14:hiddenLine xmlns:a14="http://schemas.microsoft.com/office/drawing/2010/main" w="9525">
+              <a14:hiddenLine xmlns:a14="http://schemas.microsoft.com/office/drawing/2010/main" xmlns="" w="9525">
                 <a:solidFill>
                   <a:srgbClr val="000000"/>
                 </a:solidFill>
@@ -2682,7 +2684,7 @@
           <p:cNvPr id="23554" name="Rectangle 2">
             <a:extLst>
               <a:ext uri="{FF2B5EF4-FFF2-40B4-BE49-F238E27FC236}">
-                <a16:creationId xmlns:a16="http://schemas.microsoft.com/office/drawing/2014/main" id="{DF878B3E-8479-4A7F-B924-0DB8314B2376}"/>
+                <a16:creationId xmlns:a16="http://schemas.microsoft.com/office/drawing/2014/main" xmlns="" id="{DF878B3E-8479-4A7F-B924-0DB8314B2376}"/>
               </a:ext>
             </a:extLst>
           </p:cNvPr>
@@ -2702,7 +2704,7 @@
           <p:cNvPr id="23555" name="Rectangle 3">
             <a:extLst>
               <a:ext uri="{FF2B5EF4-FFF2-40B4-BE49-F238E27FC236}">
-                <a16:creationId xmlns:a16="http://schemas.microsoft.com/office/drawing/2014/main" id="{2282D934-92EA-49D5-A68F-69E0FE530726}"/>
+                <a16:creationId xmlns:a16="http://schemas.microsoft.com/office/drawing/2014/main" xmlns="" id="{2282D934-92EA-49D5-A68F-69E0FE530726}"/>
               </a:ext>
             </a:extLst>
           </p:cNvPr>
@@ -2718,14 +2720,14 @@
           <a:ln/>
           <a:extLst>
             <a:ext uri="{909E8E84-426E-40DD-AFC4-6F175D3DCCD1}">
-              <a14:hiddenFill xmlns:a14="http://schemas.microsoft.com/office/drawing/2010/main">
+              <a14:hiddenFill xmlns:a14="http://schemas.microsoft.com/office/drawing/2010/main" xmlns="">
                 <a:solidFill>
                   <a:srgbClr val="FFFFFF"/>
                 </a:solidFill>
               </a14:hiddenFill>
             </a:ext>
             <a:ext uri="{91240B29-F687-4F45-9708-019B960494DF}">
-              <a14:hiddenLine xmlns:a14="http://schemas.microsoft.com/office/drawing/2010/main" w="9525">
+              <a14:hiddenLine xmlns:a14="http://schemas.microsoft.com/office/drawing/2010/main" xmlns="" w="9525">
                 <a:solidFill>
                   <a:srgbClr val="000000"/>
                 </a:solidFill>
@@ -2776,7 +2778,7 @@
           <p:cNvPr id="25602" name="Rectangle 2">
             <a:extLst>
               <a:ext uri="{FF2B5EF4-FFF2-40B4-BE49-F238E27FC236}">
-                <a16:creationId xmlns:a16="http://schemas.microsoft.com/office/drawing/2014/main" id="{59AB2CB0-7084-4003-8F6F-84F247F5EB38}"/>
+                <a16:creationId xmlns:a16="http://schemas.microsoft.com/office/drawing/2014/main" xmlns="" id="{59AB2CB0-7084-4003-8F6F-84F247F5EB38}"/>
               </a:ext>
             </a:extLst>
           </p:cNvPr>
@@ -2796,7 +2798,7 @@
           <p:cNvPr id="25603" name="Rectangle 3">
             <a:extLst>
               <a:ext uri="{FF2B5EF4-FFF2-40B4-BE49-F238E27FC236}">
-                <a16:creationId xmlns:a16="http://schemas.microsoft.com/office/drawing/2014/main" id="{6808F682-D9AD-4570-A2CA-1F45861E4D72}"/>
+                <a16:creationId xmlns:a16="http://schemas.microsoft.com/office/drawing/2014/main" xmlns="" id="{6808F682-D9AD-4570-A2CA-1F45861E4D72}"/>
               </a:ext>
             </a:extLst>
           </p:cNvPr>
@@ -2812,14 +2814,14 @@
           <a:ln/>
           <a:extLst>
             <a:ext uri="{909E8E84-426E-40DD-AFC4-6F175D3DCCD1}">
-              <a14:hiddenFill xmlns:a14="http://schemas.microsoft.com/office/drawing/2010/main">
+              <a14:hiddenFill xmlns:a14="http://schemas.microsoft.com/office/drawing/2010/main" xmlns="">
                 <a:solidFill>
                   <a:srgbClr val="FFFFFF"/>
                 </a:solidFill>
               </a14:hiddenFill>
             </a:ext>
             <a:ext uri="{91240B29-F687-4F45-9708-019B960494DF}">
-              <a14:hiddenLine xmlns:a14="http://schemas.microsoft.com/office/drawing/2010/main" w="9525">
+              <a14:hiddenLine xmlns:a14="http://schemas.microsoft.com/office/drawing/2010/main" xmlns="" w="9525">
                 <a:solidFill>
                   <a:srgbClr val="000000"/>
                 </a:solidFill>
@@ -2870,7 +2872,7 @@
           <p:cNvPr id="2" name="Title 1">
             <a:extLst>
               <a:ext uri="{FF2B5EF4-FFF2-40B4-BE49-F238E27FC236}">
-                <a16:creationId xmlns:a16="http://schemas.microsoft.com/office/drawing/2014/main" id="{05CC4BAC-D575-BF26-55FC-ED71B9F7E939}"/>
+                <a16:creationId xmlns:a16="http://schemas.microsoft.com/office/drawing/2014/main" xmlns="" id="{05CC4BAC-D575-BF26-55FC-ED71B9F7E939}"/>
               </a:ext>
             </a:extLst>
           </p:cNvPr>
@@ -2908,7 +2910,7 @@
           <p:cNvPr id="3" name="Subtitle 2">
             <a:extLst>
               <a:ext uri="{FF2B5EF4-FFF2-40B4-BE49-F238E27FC236}">
-                <a16:creationId xmlns:a16="http://schemas.microsoft.com/office/drawing/2014/main" id="{250BCA82-3C72-BC33-A957-A35EA10695C8}"/>
+                <a16:creationId xmlns:a16="http://schemas.microsoft.com/office/drawing/2014/main" xmlns="" id="{250BCA82-3C72-BC33-A957-A35EA10695C8}"/>
               </a:ext>
             </a:extLst>
           </p:cNvPr>
@@ -2979,7 +2981,7 @@
           <p:cNvPr id="4" name="Date Placeholder 3">
             <a:extLst>
               <a:ext uri="{FF2B5EF4-FFF2-40B4-BE49-F238E27FC236}">
-                <a16:creationId xmlns:a16="http://schemas.microsoft.com/office/drawing/2014/main" id="{CFB4D723-6418-D85C-A514-01174D0A8D69}"/>
+                <a16:creationId xmlns:a16="http://schemas.microsoft.com/office/drawing/2014/main" xmlns="" id="{CFB4D723-6418-D85C-A514-01174D0A8D69}"/>
               </a:ext>
             </a:extLst>
           </p:cNvPr>
@@ -2997,7 +2999,8 @@
           <a:p>
             <a:fld id="{88941F19-39CC-4F31-881A-05464A945BDB}" type="datetimeFigureOut">
               <a:rPr lang="en-IN" smtClean="0"/>
-              <a:t>04-02-2026</a:t>
+              <a:pPr/>
+              <a:t>09-03-2026</a:t>
             </a:fld>
             <a:endParaRPr lang="en-IN"/>
           </a:p>
@@ -3008,7 +3011,7 @@
           <p:cNvPr id="5" name="Footer Placeholder 4">
             <a:extLst>
               <a:ext uri="{FF2B5EF4-FFF2-40B4-BE49-F238E27FC236}">
-                <a16:creationId xmlns:a16="http://schemas.microsoft.com/office/drawing/2014/main" id="{5F6A6D0D-4F64-AA18-5F32-DE4BBC39D65D}"/>
+                <a16:creationId xmlns:a16="http://schemas.microsoft.com/office/drawing/2014/main" xmlns="" id="{5F6A6D0D-4F64-AA18-5F32-DE4BBC39D65D}"/>
               </a:ext>
             </a:extLst>
           </p:cNvPr>
@@ -3033,7 +3036,7 @@
           <p:cNvPr id="6" name="Slide Number Placeholder 5">
             <a:extLst>
               <a:ext uri="{FF2B5EF4-FFF2-40B4-BE49-F238E27FC236}">
-                <a16:creationId xmlns:a16="http://schemas.microsoft.com/office/drawing/2014/main" id="{4B370F1C-F44B-A18E-B1A0-9ACD5A05F631}"/>
+                <a16:creationId xmlns:a16="http://schemas.microsoft.com/office/drawing/2014/main" xmlns="" id="{4B370F1C-F44B-A18E-B1A0-9ACD5A05F631}"/>
               </a:ext>
             </a:extLst>
           </p:cNvPr>
@@ -3051,6 +3054,7 @@
           <a:p>
             <a:fld id="{8D321850-F50E-463E-95B4-E13B4C6D5005}" type="slidenum">
               <a:rPr lang="en-IN" smtClean="0"/>
+              <a:pPr/>
               <a:t>‹#›</a:t>
             </a:fld>
             <a:endParaRPr lang="en-IN"/>
@@ -3060,7 +3064,7 @@
     </p:spTree>
     <p:extLst>
       <p:ext uri="{BB962C8B-B14F-4D97-AF65-F5344CB8AC3E}">
-        <p14:creationId xmlns:p14="http://schemas.microsoft.com/office/powerpoint/2010/main" val="1697084780"/>
+        <p14:creationId xmlns:p14="http://schemas.microsoft.com/office/powerpoint/2010/main" xmlns="" val="1697084780"/>
       </p:ext>
     </p:extLst>
   </p:cSld>
@@ -3092,7 +3096,7 @@
           <p:cNvPr id="2" name="Title 1">
             <a:extLst>
               <a:ext uri="{FF2B5EF4-FFF2-40B4-BE49-F238E27FC236}">
-                <a16:creationId xmlns:a16="http://schemas.microsoft.com/office/drawing/2014/main" id="{FA7598F7-D040-F881-B8F4-DA42780AFB55}"/>
+                <a16:creationId xmlns:a16="http://schemas.microsoft.com/office/drawing/2014/main" xmlns="" id="{FA7598F7-D040-F881-B8F4-DA42780AFB55}"/>
               </a:ext>
             </a:extLst>
           </p:cNvPr>
@@ -3121,7 +3125,7 @@
           <p:cNvPr id="3" name="Vertical Text Placeholder 2">
             <a:extLst>
               <a:ext uri="{FF2B5EF4-FFF2-40B4-BE49-F238E27FC236}">
-                <a16:creationId xmlns:a16="http://schemas.microsoft.com/office/drawing/2014/main" id="{49B56BBC-ADBF-73E2-AC2F-9699BA910898}"/>
+                <a16:creationId xmlns:a16="http://schemas.microsoft.com/office/drawing/2014/main" xmlns="" id="{49B56BBC-ADBF-73E2-AC2F-9699BA910898}"/>
               </a:ext>
             </a:extLst>
           </p:cNvPr>
@@ -3179,7 +3183,7 @@
           <p:cNvPr id="4" name="Date Placeholder 3">
             <a:extLst>
               <a:ext uri="{FF2B5EF4-FFF2-40B4-BE49-F238E27FC236}">
-                <a16:creationId xmlns:a16="http://schemas.microsoft.com/office/drawing/2014/main" id="{BFCC31E8-21FF-27A5-C3B5-1FE7C69472A3}"/>
+                <a16:creationId xmlns:a16="http://schemas.microsoft.com/office/drawing/2014/main" xmlns="" id="{BFCC31E8-21FF-27A5-C3B5-1FE7C69472A3}"/>
               </a:ext>
             </a:extLst>
           </p:cNvPr>
@@ -3197,7 +3201,8 @@
           <a:p>
             <a:fld id="{88941F19-39CC-4F31-881A-05464A945BDB}" type="datetimeFigureOut">
               <a:rPr lang="en-IN" smtClean="0"/>
-              <a:t>04-02-2026</a:t>
+              <a:pPr/>
+              <a:t>09-03-2026</a:t>
             </a:fld>
             <a:endParaRPr lang="en-IN"/>
           </a:p>
@@ -3208,7 +3213,7 @@
           <p:cNvPr id="5" name="Footer Placeholder 4">
             <a:extLst>
               <a:ext uri="{FF2B5EF4-FFF2-40B4-BE49-F238E27FC236}">
-                <a16:creationId xmlns:a16="http://schemas.microsoft.com/office/drawing/2014/main" id="{F4A9B6BE-6873-CEF7-20B9-5E99C6589BB5}"/>
+                <a16:creationId xmlns:a16="http://schemas.microsoft.com/office/drawing/2014/main" xmlns="" id="{F4A9B6BE-6873-CEF7-20B9-5E99C6589BB5}"/>
               </a:ext>
             </a:extLst>
           </p:cNvPr>
@@ -3233,7 +3238,7 @@
           <p:cNvPr id="6" name="Slide Number Placeholder 5">
             <a:extLst>
               <a:ext uri="{FF2B5EF4-FFF2-40B4-BE49-F238E27FC236}">
-                <a16:creationId xmlns:a16="http://schemas.microsoft.com/office/drawing/2014/main" id="{00BB255C-DA8D-D939-CBDC-A427C270AFB0}"/>
+                <a16:creationId xmlns:a16="http://schemas.microsoft.com/office/drawing/2014/main" xmlns="" id="{00BB255C-DA8D-D939-CBDC-A427C270AFB0}"/>
               </a:ext>
             </a:extLst>
           </p:cNvPr>
@@ -3251,6 +3256,7 @@
           <a:p>
             <a:fld id="{8D321850-F50E-463E-95B4-E13B4C6D5005}" type="slidenum">
               <a:rPr lang="en-IN" smtClean="0"/>
+              <a:pPr/>
               <a:t>‹#›</a:t>
             </a:fld>
             <a:endParaRPr lang="en-IN"/>
@@ -3260,7 +3266,7 @@
     </p:spTree>
     <p:extLst>
       <p:ext uri="{BB962C8B-B14F-4D97-AF65-F5344CB8AC3E}">
-        <p14:creationId xmlns:p14="http://schemas.microsoft.com/office/powerpoint/2010/main" val="298594073"/>
+        <p14:creationId xmlns:p14="http://schemas.microsoft.com/office/powerpoint/2010/main" xmlns="" val="298594073"/>
       </p:ext>
     </p:extLst>
   </p:cSld>
@@ -3292,7 +3298,7 @@
           <p:cNvPr id="2" name="Vertical Title 1">
             <a:extLst>
               <a:ext uri="{FF2B5EF4-FFF2-40B4-BE49-F238E27FC236}">
-                <a16:creationId xmlns:a16="http://schemas.microsoft.com/office/drawing/2014/main" id="{2B7982AF-255B-9A49-4305-DCB7E4DF2107}"/>
+                <a16:creationId xmlns:a16="http://schemas.microsoft.com/office/drawing/2014/main" xmlns="" id="{2B7982AF-255B-9A49-4305-DCB7E4DF2107}"/>
               </a:ext>
             </a:extLst>
           </p:cNvPr>
@@ -3326,7 +3332,7 @@
           <p:cNvPr id="3" name="Vertical Text Placeholder 2">
             <a:extLst>
               <a:ext uri="{FF2B5EF4-FFF2-40B4-BE49-F238E27FC236}">
-                <a16:creationId xmlns:a16="http://schemas.microsoft.com/office/drawing/2014/main" id="{B5903ED2-041F-68CA-AC5D-66C23B622248}"/>
+                <a16:creationId xmlns:a16="http://schemas.microsoft.com/office/drawing/2014/main" xmlns="" id="{B5903ED2-041F-68CA-AC5D-66C23B622248}"/>
               </a:ext>
             </a:extLst>
           </p:cNvPr>
@@ -3389,7 +3395,7 @@
           <p:cNvPr id="4" name="Date Placeholder 3">
             <a:extLst>
               <a:ext uri="{FF2B5EF4-FFF2-40B4-BE49-F238E27FC236}">
-                <a16:creationId xmlns:a16="http://schemas.microsoft.com/office/drawing/2014/main" id="{3F0B1509-89B3-E41B-9352-A4552486A4B6}"/>
+                <a16:creationId xmlns:a16="http://schemas.microsoft.com/office/drawing/2014/main" xmlns="" id="{3F0B1509-89B3-E41B-9352-A4552486A4B6}"/>
               </a:ext>
             </a:extLst>
           </p:cNvPr>
@@ -3407,7 +3413,8 @@
           <a:p>
             <a:fld id="{88941F19-39CC-4F31-881A-05464A945BDB}" type="datetimeFigureOut">
               <a:rPr lang="en-IN" smtClean="0"/>
-              <a:t>04-02-2026</a:t>
+              <a:pPr/>
+              <a:t>09-03-2026</a:t>
             </a:fld>
             <a:endParaRPr lang="en-IN"/>
           </a:p>
@@ -3418,7 +3425,7 @@
           <p:cNvPr id="5" name="Footer Placeholder 4">
             <a:extLst>
               <a:ext uri="{FF2B5EF4-FFF2-40B4-BE49-F238E27FC236}">
-                <a16:creationId xmlns:a16="http://schemas.microsoft.com/office/drawing/2014/main" id="{1A5F10D1-B84D-C06F-96E9-14B011DF8CD0}"/>
+                <a16:creationId xmlns:a16="http://schemas.microsoft.com/office/drawing/2014/main" xmlns="" id="{1A5F10D1-B84D-C06F-96E9-14B011DF8CD0}"/>
               </a:ext>
             </a:extLst>
           </p:cNvPr>
@@ -3443,7 +3450,7 @@
           <p:cNvPr id="6" name="Slide Number Placeholder 5">
             <a:extLst>
               <a:ext uri="{FF2B5EF4-FFF2-40B4-BE49-F238E27FC236}">
-                <a16:creationId xmlns:a16="http://schemas.microsoft.com/office/drawing/2014/main" id="{90EEC19B-3D39-2C9F-F9CD-C0E8B5C19EF6}"/>
+                <a16:creationId xmlns:a16="http://schemas.microsoft.com/office/drawing/2014/main" xmlns="" id="{90EEC19B-3D39-2C9F-F9CD-C0E8B5C19EF6}"/>
               </a:ext>
             </a:extLst>
           </p:cNvPr>
@@ -3461,6 +3468,7 @@
           <a:p>
             <a:fld id="{8D321850-F50E-463E-95B4-E13B4C6D5005}" type="slidenum">
               <a:rPr lang="en-IN" smtClean="0"/>
+              <a:pPr/>
               <a:t>‹#›</a:t>
             </a:fld>
             <a:endParaRPr lang="en-IN"/>
@@ -3470,7 +3478,7 @@
     </p:spTree>
     <p:extLst>
       <p:ext uri="{BB962C8B-B14F-4D97-AF65-F5344CB8AC3E}">
-        <p14:creationId xmlns:p14="http://schemas.microsoft.com/office/powerpoint/2010/main" val="1169488311"/>
+        <p14:creationId xmlns:p14="http://schemas.microsoft.com/office/powerpoint/2010/main" xmlns="" val="1169488311"/>
       </p:ext>
     </p:extLst>
   </p:cSld>
@@ -3502,7 +3510,7 @@
           <p:cNvPr id="2" name="Title 1">
             <a:extLst>
               <a:ext uri="{FF2B5EF4-FFF2-40B4-BE49-F238E27FC236}">
-                <a16:creationId xmlns:a16="http://schemas.microsoft.com/office/drawing/2014/main" id="{315A02FC-586B-3DE3-F722-6E20BD8028A5}"/>
+                <a16:creationId xmlns:a16="http://schemas.microsoft.com/office/drawing/2014/main" xmlns="" id="{315A02FC-586B-3DE3-F722-6E20BD8028A5}"/>
               </a:ext>
             </a:extLst>
           </p:cNvPr>
@@ -3531,7 +3539,7 @@
           <p:cNvPr id="3" name="Content Placeholder 2">
             <a:extLst>
               <a:ext uri="{FF2B5EF4-FFF2-40B4-BE49-F238E27FC236}">
-                <a16:creationId xmlns:a16="http://schemas.microsoft.com/office/drawing/2014/main" id="{3C17E66D-8CDF-C33A-D87D-B56C238351F7}"/>
+                <a16:creationId xmlns:a16="http://schemas.microsoft.com/office/drawing/2014/main" xmlns="" id="{3C17E66D-8CDF-C33A-D87D-B56C238351F7}"/>
               </a:ext>
             </a:extLst>
           </p:cNvPr>
@@ -3589,7 +3597,7 @@
           <p:cNvPr id="4" name="Date Placeholder 3">
             <a:extLst>
               <a:ext uri="{FF2B5EF4-FFF2-40B4-BE49-F238E27FC236}">
-                <a16:creationId xmlns:a16="http://schemas.microsoft.com/office/drawing/2014/main" id="{6FB3AA4B-BCDB-1443-59BB-882627C8ED02}"/>
+                <a16:creationId xmlns:a16="http://schemas.microsoft.com/office/drawing/2014/main" xmlns="" id="{6FB3AA4B-BCDB-1443-59BB-882627C8ED02}"/>
               </a:ext>
             </a:extLst>
           </p:cNvPr>
@@ -3607,7 +3615,8 @@
           <a:p>
             <a:fld id="{88941F19-39CC-4F31-881A-05464A945BDB}" type="datetimeFigureOut">
               <a:rPr lang="en-IN" smtClean="0"/>
-              <a:t>04-02-2026</a:t>
+              <a:pPr/>
+              <a:t>09-03-2026</a:t>
             </a:fld>
             <a:endParaRPr lang="en-IN"/>
           </a:p>
@@ -3618,7 +3627,7 @@
           <p:cNvPr id="5" name="Footer Placeholder 4">
             <a:extLst>
               <a:ext uri="{FF2B5EF4-FFF2-40B4-BE49-F238E27FC236}">
-                <a16:creationId xmlns:a16="http://schemas.microsoft.com/office/drawing/2014/main" id="{EC3C0448-4A41-37CE-3926-D07479CAE3EC}"/>
+                <a16:creationId xmlns:a16="http://schemas.microsoft.com/office/drawing/2014/main" xmlns="" id="{EC3C0448-4A41-37CE-3926-D07479CAE3EC}"/>
               </a:ext>
             </a:extLst>
           </p:cNvPr>
@@ -3643,7 +3652,7 @@
           <p:cNvPr id="6" name="Slide Number Placeholder 5">
             <a:extLst>
               <a:ext uri="{FF2B5EF4-FFF2-40B4-BE49-F238E27FC236}">
-                <a16:creationId xmlns:a16="http://schemas.microsoft.com/office/drawing/2014/main" id="{6A3D703C-42F8-7433-2AB6-FC0C208EA9A3}"/>
+                <a16:creationId xmlns:a16="http://schemas.microsoft.com/office/drawing/2014/main" xmlns="" id="{6A3D703C-42F8-7433-2AB6-FC0C208EA9A3}"/>
               </a:ext>
             </a:extLst>
           </p:cNvPr>
@@ -3661,6 +3670,7 @@
           <a:p>
             <a:fld id="{8D321850-F50E-463E-95B4-E13B4C6D5005}" type="slidenum">
               <a:rPr lang="en-IN" smtClean="0"/>
+              <a:pPr/>
               <a:t>‹#›</a:t>
             </a:fld>
             <a:endParaRPr lang="en-IN"/>
@@ -3670,7 +3680,7 @@
     </p:spTree>
     <p:extLst>
       <p:ext uri="{BB962C8B-B14F-4D97-AF65-F5344CB8AC3E}">
-        <p14:creationId xmlns:p14="http://schemas.microsoft.com/office/powerpoint/2010/main" val="4284034926"/>
+        <p14:creationId xmlns:p14="http://schemas.microsoft.com/office/powerpoint/2010/main" xmlns="" val="4284034926"/>
       </p:ext>
     </p:extLst>
   </p:cSld>
@@ -3702,7 +3712,7 @@
           <p:cNvPr id="2" name="Title 1">
             <a:extLst>
               <a:ext uri="{FF2B5EF4-FFF2-40B4-BE49-F238E27FC236}">
-                <a16:creationId xmlns:a16="http://schemas.microsoft.com/office/drawing/2014/main" id="{E8D892E8-D9C3-D050-2A51-3281CE564605}"/>
+                <a16:creationId xmlns:a16="http://schemas.microsoft.com/office/drawing/2014/main" xmlns="" id="{E8D892E8-D9C3-D050-2A51-3281CE564605}"/>
               </a:ext>
             </a:extLst>
           </p:cNvPr>
@@ -3740,7 +3750,7 @@
           <p:cNvPr id="3" name="Text Placeholder 2">
             <a:extLst>
               <a:ext uri="{FF2B5EF4-FFF2-40B4-BE49-F238E27FC236}">
-                <a16:creationId xmlns:a16="http://schemas.microsoft.com/office/drawing/2014/main" id="{874D7D56-73D3-09EF-FC96-8AEEBA87697A}"/>
+                <a16:creationId xmlns:a16="http://schemas.microsoft.com/office/drawing/2014/main" xmlns="" id="{874D7D56-73D3-09EF-FC96-8AEEBA87697A}"/>
               </a:ext>
             </a:extLst>
           </p:cNvPr>
@@ -3865,7 +3875,7 @@
           <p:cNvPr id="4" name="Date Placeholder 3">
             <a:extLst>
               <a:ext uri="{FF2B5EF4-FFF2-40B4-BE49-F238E27FC236}">
-                <a16:creationId xmlns:a16="http://schemas.microsoft.com/office/drawing/2014/main" id="{8B7FC019-BAE2-C408-CE75-44B3263BD7E3}"/>
+                <a16:creationId xmlns:a16="http://schemas.microsoft.com/office/drawing/2014/main" xmlns="" id="{8B7FC019-BAE2-C408-CE75-44B3263BD7E3}"/>
               </a:ext>
             </a:extLst>
           </p:cNvPr>
@@ -3883,7 +3893,8 @@
           <a:p>
             <a:fld id="{88941F19-39CC-4F31-881A-05464A945BDB}" type="datetimeFigureOut">
               <a:rPr lang="en-IN" smtClean="0"/>
-              <a:t>04-02-2026</a:t>
+              <a:pPr/>
+              <a:t>09-03-2026</a:t>
             </a:fld>
             <a:endParaRPr lang="en-IN"/>
           </a:p>
@@ -3894,7 +3905,7 @@
           <p:cNvPr id="5" name="Footer Placeholder 4">
             <a:extLst>
               <a:ext uri="{FF2B5EF4-FFF2-40B4-BE49-F238E27FC236}">
-                <a16:creationId xmlns:a16="http://schemas.microsoft.com/office/drawing/2014/main" id="{C1913B91-7E9A-A783-59E2-35D7F22DDF9D}"/>
+                <a16:creationId xmlns:a16="http://schemas.microsoft.com/office/drawing/2014/main" xmlns="" id="{C1913B91-7E9A-A783-59E2-35D7F22DDF9D}"/>
               </a:ext>
             </a:extLst>
           </p:cNvPr>
@@ -3919,7 +3930,7 @@
           <p:cNvPr id="6" name="Slide Number Placeholder 5">
             <a:extLst>
               <a:ext uri="{FF2B5EF4-FFF2-40B4-BE49-F238E27FC236}">
-                <a16:creationId xmlns:a16="http://schemas.microsoft.com/office/drawing/2014/main" id="{C74B466E-A5D8-4865-9A45-10C8691A86A1}"/>
+                <a16:creationId xmlns:a16="http://schemas.microsoft.com/office/drawing/2014/main" xmlns="" id="{C74B466E-A5D8-4865-9A45-10C8691A86A1}"/>
               </a:ext>
             </a:extLst>
           </p:cNvPr>
@@ -3937,6 +3948,7 @@
           <a:p>
             <a:fld id="{8D321850-F50E-463E-95B4-E13B4C6D5005}" type="slidenum">
               <a:rPr lang="en-IN" smtClean="0"/>
+              <a:pPr/>
               <a:t>‹#›</a:t>
             </a:fld>
             <a:endParaRPr lang="en-IN"/>
@@ -3946,7 +3958,7 @@
     </p:spTree>
     <p:extLst>
       <p:ext uri="{BB962C8B-B14F-4D97-AF65-F5344CB8AC3E}">
-        <p14:creationId xmlns:p14="http://schemas.microsoft.com/office/powerpoint/2010/main" val="3617531207"/>
+        <p14:creationId xmlns:p14="http://schemas.microsoft.com/office/powerpoint/2010/main" xmlns="" val="3617531207"/>
       </p:ext>
     </p:extLst>
   </p:cSld>
@@ -3978,7 +3990,7 @@
           <p:cNvPr id="2" name="Title 1">
             <a:extLst>
               <a:ext uri="{FF2B5EF4-FFF2-40B4-BE49-F238E27FC236}">
-                <a16:creationId xmlns:a16="http://schemas.microsoft.com/office/drawing/2014/main" id="{3855F276-3E01-9749-0F50-5055268334C0}"/>
+                <a16:creationId xmlns:a16="http://schemas.microsoft.com/office/drawing/2014/main" xmlns="" id="{3855F276-3E01-9749-0F50-5055268334C0}"/>
               </a:ext>
             </a:extLst>
           </p:cNvPr>
@@ -4007,7 +4019,7 @@
           <p:cNvPr id="3" name="Content Placeholder 2">
             <a:extLst>
               <a:ext uri="{FF2B5EF4-FFF2-40B4-BE49-F238E27FC236}">
-                <a16:creationId xmlns:a16="http://schemas.microsoft.com/office/drawing/2014/main" id="{3DD5D60D-A176-EACE-1D7E-B08BF7F8ECDB}"/>
+                <a16:creationId xmlns:a16="http://schemas.microsoft.com/office/drawing/2014/main" xmlns="" id="{3DD5D60D-A176-EACE-1D7E-B08BF7F8ECDB}"/>
               </a:ext>
             </a:extLst>
           </p:cNvPr>
@@ -4070,7 +4082,7 @@
           <p:cNvPr id="4" name="Content Placeholder 3">
             <a:extLst>
               <a:ext uri="{FF2B5EF4-FFF2-40B4-BE49-F238E27FC236}">
-                <a16:creationId xmlns:a16="http://schemas.microsoft.com/office/drawing/2014/main" id="{C82BAFDB-D0F7-B11F-A06F-066DA917814F}"/>
+                <a16:creationId xmlns:a16="http://schemas.microsoft.com/office/drawing/2014/main" xmlns="" id="{C82BAFDB-D0F7-B11F-A06F-066DA917814F}"/>
               </a:ext>
             </a:extLst>
           </p:cNvPr>
@@ -4133,7 +4145,7 @@
           <p:cNvPr id="5" name="Date Placeholder 4">
             <a:extLst>
               <a:ext uri="{FF2B5EF4-FFF2-40B4-BE49-F238E27FC236}">
-                <a16:creationId xmlns:a16="http://schemas.microsoft.com/office/drawing/2014/main" id="{D4DC5801-5D89-7DF4-7EBD-0FACE14B3E4E}"/>
+                <a16:creationId xmlns:a16="http://schemas.microsoft.com/office/drawing/2014/main" xmlns="" id="{D4DC5801-5D89-7DF4-7EBD-0FACE14B3E4E}"/>
               </a:ext>
             </a:extLst>
           </p:cNvPr>
@@ -4151,7 +4163,8 @@
           <a:p>
             <a:fld id="{88941F19-39CC-4F31-881A-05464A945BDB}" type="datetimeFigureOut">
               <a:rPr lang="en-IN" smtClean="0"/>
-              <a:t>04-02-2026</a:t>
+              <a:pPr/>
+              <a:t>09-03-2026</a:t>
             </a:fld>
             <a:endParaRPr lang="en-IN"/>
           </a:p>
@@ -4162,7 +4175,7 @@
           <p:cNvPr id="6" name="Footer Placeholder 5">
             <a:extLst>
               <a:ext uri="{FF2B5EF4-FFF2-40B4-BE49-F238E27FC236}">
-                <a16:creationId xmlns:a16="http://schemas.microsoft.com/office/drawing/2014/main" id="{A8EEBB67-F1F3-809C-8C5C-527CF20CC7A8}"/>
+                <a16:creationId xmlns:a16="http://schemas.microsoft.com/office/drawing/2014/main" xmlns="" id="{A8EEBB67-F1F3-809C-8C5C-527CF20CC7A8}"/>
               </a:ext>
             </a:extLst>
           </p:cNvPr>
@@ -4187,7 +4200,7 @@
           <p:cNvPr id="7" name="Slide Number Placeholder 6">
             <a:extLst>
               <a:ext uri="{FF2B5EF4-FFF2-40B4-BE49-F238E27FC236}">
-                <a16:creationId xmlns:a16="http://schemas.microsoft.com/office/drawing/2014/main" id="{2BE0CEA8-48DD-A3E6-33A2-7E0B8308C010}"/>
+                <a16:creationId xmlns:a16="http://schemas.microsoft.com/office/drawing/2014/main" xmlns="" id="{2BE0CEA8-48DD-A3E6-33A2-7E0B8308C010}"/>
               </a:ext>
             </a:extLst>
           </p:cNvPr>
@@ -4205,6 +4218,7 @@
           <a:p>
             <a:fld id="{8D321850-F50E-463E-95B4-E13B4C6D5005}" type="slidenum">
               <a:rPr lang="en-IN" smtClean="0"/>
+              <a:pPr/>
               <a:t>‹#›</a:t>
             </a:fld>
             <a:endParaRPr lang="en-IN"/>
@@ -4214,7 +4228,7 @@
     </p:spTree>
     <p:extLst>
       <p:ext uri="{BB962C8B-B14F-4D97-AF65-F5344CB8AC3E}">
-        <p14:creationId xmlns:p14="http://schemas.microsoft.com/office/powerpoint/2010/main" val="4071515228"/>
+        <p14:creationId xmlns:p14="http://schemas.microsoft.com/office/powerpoint/2010/main" xmlns="" val="4071515228"/>
       </p:ext>
     </p:extLst>
   </p:cSld>
@@ -4246,7 +4260,7 @@
           <p:cNvPr id="2" name="Title 1">
             <a:extLst>
               <a:ext uri="{FF2B5EF4-FFF2-40B4-BE49-F238E27FC236}">
-                <a16:creationId xmlns:a16="http://schemas.microsoft.com/office/drawing/2014/main" id="{0C56DF1B-772D-849C-B3A2-7C4AB800F246}"/>
+                <a16:creationId xmlns:a16="http://schemas.microsoft.com/office/drawing/2014/main" xmlns="" id="{0C56DF1B-772D-849C-B3A2-7C4AB800F246}"/>
               </a:ext>
             </a:extLst>
           </p:cNvPr>
@@ -4280,7 +4294,7 @@
           <p:cNvPr id="3" name="Text Placeholder 2">
             <a:extLst>
               <a:ext uri="{FF2B5EF4-FFF2-40B4-BE49-F238E27FC236}">
-                <a16:creationId xmlns:a16="http://schemas.microsoft.com/office/drawing/2014/main" id="{5DAA204B-2B1A-E261-02E7-5CB5241BB321}"/>
+                <a16:creationId xmlns:a16="http://schemas.microsoft.com/office/drawing/2014/main" xmlns="" id="{5DAA204B-2B1A-E261-02E7-5CB5241BB321}"/>
               </a:ext>
             </a:extLst>
           </p:cNvPr>
@@ -4351,7 +4365,7 @@
           <p:cNvPr id="4" name="Content Placeholder 3">
             <a:extLst>
               <a:ext uri="{FF2B5EF4-FFF2-40B4-BE49-F238E27FC236}">
-                <a16:creationId xmlns:a16="http://schemas.microsoft.com/office/drawing/2014/main" id="{1F838A3E-851F-D790-2CC8-20C85C8150C4}"/>
+                <a16:creationId xmlns:a16="http://schemas.microsoft.com/office/drawing/2014/main" xmlns="" id="{1F838A3E-851F-D790-2CC8-20C85C8150C4}"/>
               </a:ext>
             </a:extLst>
           </p:cNvPr>
@@ -4414,7 +4428,7 @@
           <p:cNvPr id="5" name="Text Placeholder 4">
             <a:extLst>
               <a:ext uri="{FF2B5EF4-FFF2-40B4-BE49-F238E27FC236}">
-                <a16:creationId xmlns:a16="http://schemas.microsoft.com/office/drawing/2014/main" id="{33CA0833-B6C8-5263-049D-67DA88C05F08}"/>
+                <a16:creationId xmlns:a16="http://schemas.microsoft.com/office/drawing/2014/main" xmlns="" id="{33CA0833-B6C8-5263-049D-67DA88C05F08}"/>
               </a:ext>
             </a:extLst>
           </p:cNvPr>
@@ -4485,7 +4499,7 @@
           <p:cNvPr id="6" name="Content Placeholder 5">
             <a:extLst>
               <a:ext uri="{FF2B5EF4-FFF2-40B4-BE49-F238E27FC236}">
-                <a16:creationId xmlns:a16="http://schemas.microsoft.com/office/drawing/2014/main" id="{D8D23E42-51BF-7813-FF57-96B565835B17}"/>
+                <a16:creationId xmlns:a16="http://schemas.microsoft.com/office/drawing/2014/main" xmlns="" id="{D8D23E42-51BF-7813-FF57-96B565835B17}"/>
               </a:ext>
             </a:extLst>
           </p:cNvPr>
@@ -4548,7 +4562,7 @@
           <p:cNvPr id="7" name="Date Placeholder 6">
             <a:extLst>
               <a:ext uri="{FF2B5EF4-FFF2-40B4-BE49-F238E27FC236}">
-                <a16:creationId xmlns:a16="http://schemas.microsoft.com/office/drawing/2014/main" id="{031AF455-7452-E023-DB78-78A6828C9E50}"/>
+                <a16:creationId xmlns:a16="http://schemas.microsoft.com/office/drawing/2014/main" xmlns="" id="{031AF455-7452-E023-DB78-78A6828C9E50}"/>
               </a:ext>
             </a:extLst>
           </p:cNvPr>
@@ -4566,7 +4580,8 @@
           <a:p>
             <a:fld id="{88941F19-39CC-4F31-881A-05464A945BDB}" type="datetimeFigureOut">
               <a:rPr lang="en-IN" smtClean="0"/>
-              <a:t>04-02-2026</a:t>
+              <a:pPr/>
+              <a:t>09-03-2026</a:t>
             </a:fld>
             <a:endParaRPr lang="en-IN"/>
           </a:p>
@@ -4577,7 +4592,7 @@
           <p:cNvPr id="8" name="Footer Placeholder 7">
             <a:extLst>
               <a:ext uri="{FF2B5EF4-FFF2-40B4-BE49-F238E27FC236}">
-                <a16:creationId xmlns:a16="http://schemas.microsoft.com/office/drawing/2014/main" id="{B383C350-9FCA-C263-0421-D5D1C4743A1B}"/>
+                <a16:creationId xmlns:a16="http://schemas.microsoft.com/office/drawing/2014/main" xmlns="" id="{B383C350-9FCA-C263-0421-D5D1C4743A1B}"/>
               </a:ext>
             </a:extLst>
           </p:cNvPr>
@@ -4602,7 +4617,7 @@
           <p:cNvPr id="9" name="Slide Number Placeholder 8">
             <a:extLst>
               <a:ext uri="{FF2B5EF4-FFF2-40B4-BE49-F238E27FC236}">
-                <a16:creationId xmlns:a16="http://schemas.microsoft.com/office/drawing/2014/main" id="{06D66EC7-8DC2-6D93-DE02-B8FA95CAF3FB}"/>
+                <a16:creationId xmlns:a16="http://schemas.microsoft.com/office/drawing/2014/main" xmlns="" id="{06D66EC7-8DC2-6D93-DE02-B8FA95CAF3FB}"/>
               </a:ext>
             </a:extLst>
           </p:cNvPr>
@@ -4620,6 +4635,7 @@
           <a:p>
             <a:fld id="{8D321850-F50E-463E-95B4-E13B4C6D5005}" type="slidenum">
               <a:rPr lang="en-IN" smtClean="0"/>
+              <a:pPr/>
               <a:t>‹#›</a:t>
             </a:fld>
             <a:endParaRPr lang="en-IN"/>
@@ -4629,7 +4645,7 @@
     </p:spTree>
     <p:extLst>
       <p:ext uri="{BB962C8B-B14F-4D97-AF65-F5344CB8AC3E}">
-        <p14:creationId xmlns:p14="http://schemas.microsoft.com/office/powerpoint/2010/main" val="1865383081"/>
+        <p14:creationId xmlns:p14="http://schemas.microsoft.com/office/powerpoint/2010/main" xmlns="" val="1865383081"/>
       </p:ext>
     </p:extLst>
   </p:cSld>
@@ -4661,7 +4677,7 @@
           <p:cNvPr id="2" name="Title 1">
             <a:extLst>
               <a:ext uri="{FF2B5EF4-FFF2-40B4-BE49-F238E27FC236}">
-                <a16:creationId xmlns:a16="http://schemas.microsoft.com/office/drawing/2014/main" id="{A8A00873-5336-A58B-5D14-F8738B73FCC3}"/>
+                <a16:creationId xmlns:a16="http://schemas.microsoft.com/office/drawing/2014/main" xmlns="" id="{A8A00873-5336-A58B-5D14-F8738B73FCC3}"/>
               </a:ext>
             </a:extLst>
           </p:cNvPr>
@@ -4690,7 +4706,7 @@
           <p:cNvPr id="3" name="Date Placeholder 2">
             <a:extLst>
               <a:ext uri="{FF2B5EF4-FFF2-40B4-BE49-F238E27FC236}">
-                <a16:creationId xmlns:a16="http://schemas.microsoft.com/office/drawing/2014/main" id="{3A91DF9E-17C9-5855-68DF-D6CDA55C6173}"/>
+                <a16:creationId xmlns:a16="http://schemas.microsoft.com/office/drawing/2014/main" xmlns="" id="{3A91DF9E-17C9-5855-68DF-D6CDA55C6173}"/>
               </a:ext>
             </a:extLst>
           </p:cNvPr>
@@ -4708,7 +4724,8 @@
           <a:p>
             <a:fld id="{88941F19-39CC-4F31-881A-05464A945BDB}" type="datetimeFigureOut">
               <a:rPr lang="en-IN" smtClean="0"/>
-              <a:t>04-02-2026</a:t>
+              <a:pPr/>
+              <a:t>09-03-2026</a:t>
             </a:fld>
             <a:endParaRPr lang="en-IN"/>
           </a:p>
@@ -4719,7 +4736,7 @@
           <p:cNvPr id="4" name="Footer Placeholder 3">
             <a:extLst>
               <a:ext uri="{FF2B5EF4-FFF2-40B4-BE49-F238E27FC236}">
-                <a16:creationId xmlns:a16="http://schemas.microsoft.com/office/drawing/2014/main" id="{F4E804D6-1294-14E6-1FDB-45CFFC10F35F}"/>
+                <a16:creationId xmlns:a16="http://schemas.microsoft.com/office/drawing/2014/main" xmlns="" id="{F4E804D6-1294-14E6-1FDB-45CFFC10F35F}"/>
               </a:ext>
             </a:extLst>
           </p:cNvPr>
@@ -4744,7 +4761,7 @@
           <p:cNvPr id="5" name="Slide Number Placeholder 4">
             <a:extLst>
               <a:ext uri="{FF2B5EF4-FFF2-40B4-BE49-F238E27FC236}">
-                <a16:creationId xmlns:a16="http://schemas.microsoft.com/office/drawing/2014/main" id="{8EB6D640-C95F-322B-4F7A-CE7CCE2DACF3}"/>
+                <a16:creationId xmlns:a16="http://schemas.microsoft.com/office/drawing/2014/main" xmlns="" id="{8EB6D640-C95F-322B-4F7A-CE7CCE2DACF3}"/>
               </a:ext>
             </a:extLst>
           </p:cNvPr>
@@ -4762,6 +4779,7 @@
           <a:p>
             <a:fld id="{8D321850-F50E-463E-95B4-E13B4C6D5005}" type="slidenum">
               <a:rPr lang="en-IN" smtClean="0"/>
+              <a:pPr/>
               <a:t>‹#›</a:t>
             </a:fld>
             <a:endParaRPr lang="en-IN"/>
@@ -4771,7 +4789,7 @@
     </p:spTree>
     <p:extLst>
       <p:ext uri="{BB962C8B-B14F-4D97-AF65-F5344CB8AC3E}">
-        <p14:creationId xmlns:p14="http://schemas.microsoft.com/office/powerpoint/2010/main" val="3391076686"/>
+        <p14:creationId xmlns:p14="http://schemas.microsoft.com/office/powerpoint/2010/main" xmlns="" val="3391076686"/>
       </p:ext>
     </p:extLst>
   </p:cSld>
@@ -4803,7 +4821,7 @@
           <p:cNvPr id="2" name="Date Placeholder 1">
             <a:extLst>
               <a:ext uri="{FF2B5EF4-FFF2-40B4-BE49-F238E27FC236}">
-                <a16:creationId xmlns:a16="http://schemas.microsoft.com/office/drawing/2014/main" id="{FB486ED2-8717-463D-DD68-B408902A8888}"/>
+                <a16:creationId xmlns:a16="http://schemas.microsoft.com/office/drawing/2014/main" xmlns="" id="{FB486ED2-8717-463D-DD68-B408902A8888}"/>
               </a:ext>
             </a:extLst>
           </p:cNvPr>
@@ -4821,7 +4839,8 @@
           <a:p>
             <a:fld id="{88941F19-39CC-4F31-881A-05464A945BDB}" type="datetimeFigureOut">
               <a:rPr lang="en-IN" smtClean="0"/>
-              <a:t>04-02-2026</a:t>
+              <a:pPr/>
+              <a:t>09-03-2026</a:t>
             </a:fld>
             <a:endParaRPr lang="en-IN"/>
           </a:p>
@@ -4832,7 +4851,7 @@
           <p:cNvPr id="3" name="Footer Placeholder 2">
             <a:extLst>
               <a:ext uri="{FF2B5EF4-FFF2-40B4-BE49-F238E27FC236}">
-                <a16:creationId xmlns:a16="http://schemas.microsoft.com/office/drawing/2014/main" id="{4800D06B-A206-2364-31D0-631FE5F12145}"/>
+                <a16:creationId xmlns:a16="http://schemas.microsoft.com/office/drawing/2014/main" xmlns="" id="{4800D06B-A206-2364-31D0-631FE5F12145}"/>
               </a:ext>
             </a:extLst>
           </p:cNvPr>
@@ -4857,7 +4876,7 @@
           <p:cNvPr id="4" name="Slide Number Placeholder 3">
             <a:extLst>
               <a:ext uri="{FF2B5EF4-FFF2-40B4-BE49-F238E27FC236}">
-                <a16:creationId xmlns:a16="http://schemas.microsoft.com/office/drawing/2014/main" id="{A5A71047-950B-C965-603D-30B6C17B6360}"/>
+                <a16:creationId xmlns:a16="http://schemas.microsoft.com/office/drawing/2014/main" xmlns="" id="{A5A71047-950B-C965-603D-30B6C17B6360}"/>
               </a:ext>
             </a:extLst>
           </p:cNvPr>
@@ -4875,6 +4894,7 @@
           <a:p>
             <a:fld id="{8D321850-F50E-463E-95B4-E13B4C6D5005}" type="slidenum">
               <a:rPr lang="en-IN" smtClean="0"/>
+              <a:pPr/>
               <a:t>‹#›</a:t>
             </a:fld>
             <a:endParaRPr lang="en-IN"/>
@@ -4884,7 +4904,7 @@
     </p:spTree>
     <p:extLst>
       <p:ext uri="{BB962C8B-B14F-4D97-AF65-F5344CB8AC3E}">
-        <p14:creationId xmlns:p14="http://schemas.microsoft.com/office/powerpoint/2010/main" val="2211206709"/>
+        <p14:creationId xmlns:p14="http://schemas.microsoft.com/office/powerpoint/2010/main" xmlns="" val="2211206709"/>
       </p:ext>
     </p:extLst>
   </p:cSld>
@@ -4916,7 +4936,7 @@
           <p:cNvPr id="2" name="Title 1">
             <a:extLst>
               <a:ext uri="{FF2B5EF4-FFF2-40B4-BE49-F238E27FC236}">
-                <a16:creationId xmlns:a16="http://schemas.microsoft.com/office/drawing/2014/main" id="{D28E0360-ECBA-1C87-5410-1E1ABD431B02}"/>
+                <a16:creationId xmlns:a16="http://schemas.microsoft.com/office/drawing/2014/main" xmlns="" id="{D28E0360-ECBA-1C87-5410-1E1ABD431B02}"/>
               </a:ext>
             </a:extLst>
           </p:cNvPr>
@@ -4954,7 +4974,7 @@
           <p:cNvPr id="3" name="Content Placeholder 2">
             <a:extLst>
               <a:ext uri="{FF2B5EF4-FFF2-40B4-BE49-F238E27FC236}">
-                <a16:creationId xmlns:a16="http://schemas.microsoft.com/office/drawing/2014/main" id="{492162B5-77D4-B350-6211-DCD30B2B6252}"/>
+                <a16:creationId xmlns:a16="http://schemas.microsoft.com/office/drawing/2014/main" xmlns="" id="{492162B5-77D4-B350-6211-DCD30B2B6252}"/>
               </a:ext>
             </a:extLst>
           </p:cNvPr>
@@ -5045,7 +5065,7 @@
           <p:cNvPr id="4" name="Text Placeholder 3">
             <a:extLst>
               <a:ext uri="{FF2B5EF4-FFF2-40B4-BE49-F238E27FC236}">
-                <a16:creationId xmlns:a16="http://schemas.microsoft.com/office/drawing/2014/main" id="{DF0CC778-3A0F-3AB6-591D-972CFE1880B1}"/>
+                <a16:creationId xmlns:a16="http://schemas.microsoft.com/office/drawing/2014/main" xmlns="" id="{DF0CC778-3A0F-3AB6-591D-972CFE1880B1}"/>
               </a:ext>
             </a:extLst>
           </p:cNvPr>
@@ -5116,7 +5136,7 @@
           <p:cNvPr id="5" name="Date Placeholder 4">
             <a:extLst>
               <a:ext uri="{FF2B5EF4-FFF2-40B4-BE49-F238E27FC236}">
-                <a16:creationId xmlns:a16="http://schemas.microsoft.com/office/drawing/2014/main" id="{AD1BDC2D-8FCD-69AF-3203-962713421616}"/>
+                <a16:creationId xmlns:a16="http://schemas.microsoft.com/office/drawing/2014/main" xmlns="" id="{AD1BDC2D-8FCD-69AF-3203-962713421616}"/>
               </a:ext>
             </a:extLst>
           </p:cNvPr>
@@ -5134,7 +5154,8 @@
           <a:p>
             <a:fld id="{88941F19-39CC-4F31-881A-05464A945BDB}" type="datetimeFigureOut">
               <a:rPr lang="en-IN" smtClean="0"/>
-              <a:t>04-02-2026</a:t>
+              <a:pPr/>
+              <a:t>09-03-2026</a:t>
             </a:fld>
             <a:endParaRPr lang="en-IN"/>
           </a:p>
@@ -5145,7 +5166,7 @@
           <p:cNvPr id="6" name="Footer Placeholder 5">
             <a:extLst>
               <a:ext uri="{FF2B5EF4-FFF2-40B4-BE49-F238E27FC236}">
-                <a16:creationId xmlns:a16="http://schemas.microsoft.com/office/drawing/2014/main" id="{1C38454D-FDC6-75DA-5B78-BBE8D927E7FF}"/>
+                <a16:creationId xmlns:a16="http://schemas.microsoft.com/office/drawing/2014/main" xmlns="" id="{1C38454D-FDC6-75DA-5B78-BBE8D927E7FF}"/>
               </a:ext>
             </a:extLst>
           </p:cNvPr>
@@ -5170,7 +5191,7 @@
           <p:cNvPr id="7" name="Slide Number Placeholder 6">
             <a:extLst>
               <a:ext uri="{FF2B5EF4-FFF2-40B4-BE49-F238E27FC236}">
-                <a16:creationId xmlns:a16="http://schemas.microsoft.com/office/drawing/2014/main" id="{D25540AA-F0DA-1728-9D50-41D467949930}"/>
+                <a16:creationId xmlns:a16="http://schemas.microsoft.com/office/drawing/2014/main" xmlns="" id="{D25540AA-F0DA-1728-9D50-41D467949930}"/>
               </a:ext>
             </a:extLst>
           </p:cNvPr>
@@ -5188,6 +5209,7 @@
           <a:p>
             <a:fld id="{8D321850-F50E-463E-95B4-E13B4C6D5005}" type="slidenum">
               <a:rPr lang="en-IN" smtClean="0"/>
+              <a:pPr/>
               <a:t>‹#›</a:t>
             </a:fld>
             <a:endParaRPr lang="en-IN"/>
@@ -5197,7 +5219,7 @@
     </p:spTree>
     <p:extLst>
       <p:ext uri="{BB962C8B-B14F-4D97-AF65-F5344CB8AC3E}">
-        <p14:creationId xmlns:p14="http://schemas.microsoft.com/office/powerpoint/2010/main" val="1876693763"/>
+        <p14:creationId xmlns:p14="http://schemas.microsoft.com/office/powerpoint/2010/main" xmlns="" val="1876693763"/>
       </p:ext>
     </p:extLst>
   </p:cSld>
@@ -5229,7 +5251,7 @@
           <p:cNvPr id="2" name="Title 1">
             <a:extLst>
               <a:ext uri="{FF2B5EF4-FFF2-40B4-BE49-F238E27FC236}">
-                <a16:creationId xmlns:a16="http://schemas.microsoft.com/office/drawing/2014/main" id="{1B741C18-36FE-F705-0F3B-115C1DE41762}"/>
+                <a16:creationId xmlns:a16="http://schemas.microsoft.com/office/drawing/2014/main" xmlns="" id="{1B741C18-36FE-F705-0F3B-115C1DE41762}"/>
               </a:ext>
             </a:extLst>
           </p:cNvPr>
@@ -5267,7 +5289,7 @@
           <p:cNvPr id="3" name="Picture Placeholder 2">
             <a:extLst>
               <a:ext uri="{FF2B5EF4-FFF2-40B4-BE49-F238E27FC236}">
-                <a16:creationId xmlns:a16="http://schemas.microsoft.com/office/drawing/2014/main" id="{588AA777-2A5C-B212-EBF5-511DEAB0E2F9}"/>
+                <a16:creationId xmlns:a16="http://schemas.microsoft.com/office/drawing/2014/main" xmlns="" id="{588AA777-2A5C-B212-EBF5-511DEAB0E2F9}"/>
               </a:ext>
             </a:extLst>
           </p:cNvPr>
@@ -5334,7 +5356,7 @@
           <p:cNvPr id="4" name="Text Placeholder 3">
             <a:extLst>
               <a:ext uri="{FF2B5EF4-FFF2-40B4-BE49-F238E27FC236}">
-                <a16:creationId xmlns:a16="http://schemas.microsoft.com/office/drawing/2014/main" id="{915CDCCF-7F89-BAE4-97F0-0A6361E82437}"/>
+                <a16:creationId xmlns:a16="http://schemas.microsoft.com/office/drawing/2014/main" xmlns="" id="{915CDCCF-7F89-BAE4-97F0-0A6361E82437}"/>
               </a:ext>
             </a:extLst>
           </p:cNvPr>
@@ -5405,7 +5427,7 @@
           <p:cNvPr id="5" name="Date Placeholder 4">
             <a:extLst>
               <a:ext uri="{FF2B5EF4-FFF2-40B4-BE49-F238E27FC236}">
-                <a16:creationId xmlns:a16="http://schemas.microsoft.com/office/drawing/2014/main" id="{10CCB020-409C-1036-0382-1091D417CD3E}"/>
+                <a16:creationId xmlns:a16="http://schemas.microsoft.com/office/drawing/2014/main" xmlns="" id="{10CCB020-409C-1036-0382-1091D417CD3E}"/>
               </a:ext>
             </a:extLst>
           </p:cNvPr>
@@ -5423,7 +5445,8 @@
           <a:p>
             <a:fld id="{88941F19-39CC-4F31-881A-05464A945BDB}" type="datetimeFigureOut">
               <a:rPr lang="en-IN" smtClean="0"/>
-              <a:t>04-02-2026</a:t>
+              <a:pPr/>
+              <a:t>09-03-2026</a:t>
             </a:fld>
             <a:endParaRPr lang="en-IN"/>
           </a:p>
@@ -5434,7 +5457,7 @@
           <p:cNvPr id="6" name="Footer Placeholder 5">
             <a:extLst>
               <a:ext uri="{FF2B5EF4-FFF2-40B4-BE49-F238E27FC236}">
-                <a16:creationId xmlns:a16="http://schemas.microsoft.com/office/drawing/2014/main" id="{021489E5-0F50-2FBB-C222-EE1B283764A2}"/>
+                <a16:creationId xmlns:a16="http://schemas.microsoft.com/office/drawing/2014/main" xmlns="" id="{021489E5-0F50-2FBB-C222-EE1B283764A2}"/>
               </a:ext>
             </a:extLst>
           </p:cNvPr>
@@ -5459,7 +5482,7 @@
           <p:cNvPr id="7" name="Slide Number Placeholder 6">
             <a:extLst>
               <a:ext uri="{FF2B5EF4-FFF2-40B4-BE49-F238E27FC236}">
-                <a16:creationId xmlns:a16="http://schemas.microsoft.com/office/drawing/2014/main" id="{DC0FA90B-1E5E-FF68-86FC-EC5DD3B44A93}"/>
+                <a16:creationId xmlns:a16="http://schemas.microsoft.com/office/drawing/2014/main" xmlns="" id="{DC0FA90B-1E5E-FF68-86FC-EC5DD3B44A93}"/>
               </a:ext>
             </a:extLst>
           </p:cNvPr>
@@ -5477,6 +5500,7 @@
           <a:p>
             <a:fld id="{8D321850-F50E-463E-95B4-E13B4C6D5005}" type="slidenum">
               <a:rPr lang="en-IN" smtClean="0"/>
+              <a:pPr/>
               <a:t>‹#›</a:t>
             </a:fld>
             <a:endParaRPr lang="en-IN"/>
@@ -5486,7 +5510,7 @@
     </p:spTree>
     <p:extLst>
       <p:ext uri="{BB962C8B-B14F-4D97-AF65-F5344CB8AC3E}">
-        <p14:creationId xmlns:p14="http://schemas.microsoft.com/office/powerpoint/2010/main" val="559457658"/>
+        <p14:creationId xmlns:p14="http://schemas.microsoft.com/office/powerpoint/2010/main" xmlns="" val="559457658"/>
       </p:ext>
     </p:extLst>
   </p:cSld>
@@ -5523,7 +5547,7 @@
           <p:cNvPr id="2" name="Title Placeholder 1">
             <a:extLst>
               <a:ext uri="{FF2B5EF4-FFF2-40B4-BE49-F238E27FC236}">
-                <a16:creationId xmlns:a16="http://schemas.microsoft.com/office/drawing/2014/main" id="{DB696BA4-4C07-FFEB-434B-29587AE0B4C8}"/>
+                <a16:creationId xmlns:a16="http://schemas.microsoft.com/office/drawing/2014/main" xmlns="" id="{DB696BA4-4C07-FFEB-434B-29587AE0B4C8}"/>
               </a:ext>
             </a:extLst>
           </p:cNvPr>
@@ -5562,7 +5586,7 @@
           <p:cNvPr id="3" name="Text Placeholder 2">
             <a:extLst>
               <a:ext uri="{FF2B5EF4-FFF2-40B4-BE49-F238E27FC236}">
-                <a16:creationId xmlns:a16="http://schemas.microsoft.com/office/drawing/2014/main" id="{8DA51201-1162-F369-6BBF-3F0CF812BD51}"/>
+                <a16:creationId xmlns:a16="http://schemas.microsoft.com/office/drawing/2014/main" xmlns="" id="{8DA51201-1162-F369-6BBF-3F0CF812BD51}"/>
               </a:ext>
             </a:extLst>
           </p:cNvPr>
@@ -5630,7 +5654,7 @@
           <p:cNvPr id="4" name="Date Placeholder 3">
             <a:extLst>
               <a:ext uri="{FF2B5EF4-FFF2-40B4-BE49-F238E27FC236}">
-                <a16:creationId xmlns:a16="http://schemas.microsoft.com/office/drawing/2014/main" id="{662A997F-EC55-81DC-94D6-8F882B4015A0}"/>
+                <a16:creationId xmlns:a16="http://schemas.microsoft.com/office/drawing/2014/main" xmlns="" id="{662A997F-EC55-81DC-94D6-8F882B4015A0}"/>
               </a:ext>
             </a:extLst>
           </p:cNvPr>
@@ -5666,7 +5690,8 @@
           <a:p>
             <a:fld id="{88941F19-39CC-4F31-881A-05464A945BDB}" type="datetimeFigureOut">
               <a:rPr lang="en-IN" smtClean="0"/>
-              <a:t>04-02-2026</a:t>
+              <a:pPr/>
+              <a:t>09-03-2026</a:t>
             </a:fld>
             <a:endParaRPr lang="en-IN"/>
           </a:p>
@@ -5677,7 +5702,7 @@
           <p:cNvPr id="5" name="Footer Placeholder 4">
             <a:extLst>
               <a:ext uri="{FF2B5EF4-FFF2-40B4-BE49-F238E27FC236}">
-                <a16:creationId xmlns:a16="http://schemas.microsoft.com/office/drawing/2014/main" id="{5F6255B7-BE6D-9D48-ACC0-5713AC625D95}"/>
+                <a16:creationId xmlns:a16="http://schemas.microsoft.com/office/drawing/2014/main" xmlns="" id="{5F6255B7-BE6D-9D48-ACC0-5713AC625D95}"/>
               </a:ext>
             </a:extLst>
           </p:cNvPr>
@@ -5720,7 +5745,7 @@
           <p:cNvPr id="6" name="Slide Number Placeholder 5">
             <a:extLst>
               <a:ext uri="{FF2B5EF4-FFF2-40B4-BE49-F238E27FC236}">
-                <a16:creationId xmlns:a16="http://schemas.microsoft.com/office/drawing/2014/main" id="{13519CCD-DC8E-1457-D9DD-4C773DA0F3C0}"/>
+                <a16:creationId xmlns:a16="http://schemas.microsoft.com/office/drawing/2014/main" xmlns="" id="{13519CCD-DC8E-1457-D9DD-4C773DA0F3C0}"/>
               </a:ext>
             </a:extLst>
           </p:cNvPr>
@@ -5756,6 +5781,7 @@
           <a:p>
             <a:fld id="{8D321850-F50E-463E-95B4-E13B4C6D5005}" type="slidenum">
               <a:rPr lang="en-IN" smtClean="0"/>
+              <a:pPr/>
               <a:t>‹#›</a:t>
             </a:fld>
             <a:endParaRPr lang="en-IN"/>
@@ -5765,7 +5791,7 @@
     </p:spTree>
     <p:extLst>
       <p:ext uri="{BB962C8B-B14F-4D97-AF65-F5344CB8AC3E}">
-        <p14:creationId xmlns:p14="http://schemas.microsoft.com/office/powerpoint/2010/main" val="2189129737"/>
+        <p14:creationId xmlns:p14="http://schemas.microsoft.com/office/powerpoint/2010/main" xmlns="" val="2189129737"/>
       </p:ext>
     </p:extLst>
   </p:cSld>
@@ -6088,7 +6114,7 @@
           <p:cNvPr id="2" name="Title 1">
             <a:extLst>
               <a:ext uri="{FF2B5EF4-FFF2-40B4-BE49-F238E27FC236}">
-                <a16:creationId xmlns:a16="http://schemas.microsoft.com/office/drawing/2014/main" id="{75CC2084-9A18-6B8D-549E-09DE634583A3}"/>
+                <a16:creationId xmlns:a16="http://schemas.microsoft.com/office/drawing/2014/main" xmlns="" id="{75CC2084-9A18-6B8D-549E-09DE634583A3}"/>
               </a:ext>
             </a:extLst>
           </p:cNvPr>
@@ -6124,7 +6150,7 @@
           <p:cNvPr id="3" name="Subtitle 2">
             <a:extLst>
               <a:ext uri="{FF2B5EF4-FFF2-40B4-BE49-F238E27FC236}">
-                <a16:creationId xmlns:a16="http://schemas.microsoft.com/office/drawing/2014/main" id="{9DC4C8FE-9EF5-9182-E730-46B57E626F2F}"/>
+                <a16:creationId xmlns:a16="http://schemas.microsoft.com/office/drawing/2014/main" xmlns="" id="{9DC4C8FE-9EF5-9182-E730-46B57E626F2F}"/>
               </a:ext>
             </a:extLst>
           </p:cNvPr>
@@ -6150,7 +6176,7 @@
     </p:spTree>
     <p:extLst>
       <p:ext uri="{BB962C8B-B14F-4D97-AF65-F5344CB8AC3E}">
-        <p14:creationId xmlns:p14="http://schemas.microsoft.com/office/powerpoint/2010/main" val="1517197452"/>
+        <p14:creationId xmlns:p14="http://schemas.microsoft.com/office/powerpoint/2010/main" xmlns="" val="1517197452"/>
       </p:ext>
     </p:extLst>
   </p:cSld>
@@ -6182,7 +6208,7 @@
           <p:cNvPr id="22530" name="Rectangle 2">
             <a:extLst>
               <a:ext uri="{FF2B5EF4-FFF2-40B4-BE49-F238E27FC236}">
-                <a16:creationId xmlns:a16="http://schemas.microsoft.com/office/drawing/2014/main" id="{FC14ED24-AEFF-4F38-8076-4F8FF58C3F94}"/>
+                <a16:creationId xmlns:a16="http://schemas.microsoft.com/office/drawing/2014/main" xmlns="" id="{FC14ED24-AEFF-4F38-8076-4F8FF58C3F94}"/>
               </a:ext>
             </a:extLst>
           </p:cNvPr>
@@ -6218,7 +6244,7 @@
           <p:cNvPr id="22531" name="Rectangle 3">
             <a:extLst>
               <a:ext uri="{FF2B5EF4-FFF2-40B4-BE49-F238E27FC236}">
-                <a16:creationId xmlns:a16="http://schemas.microsoft.com/office/drawing/2014/main" id="{DEEAF946-6112-4200-8913-ED1F42CE1EF2}"/>
+                <a16:creationId xmlns:a16="http://schemas.microsoft.com/office/drawing/2014/main" xmlns="" id="{DEEAF946-6112-4200-8913-ED1F42CE1EF2}"/>
               </a:ext>
             </a:extLst>
           </p:cNvPr>
@@ -6290,7 +6316,7 @@
           <p:cNvPr id="22532" name="Picture 1">
             <a:extLst>
               <a:ext uri="{FF2B5EF4-FFF2-40B4-BE49-F238E27FC236}">
-                <a16:creationId xmlns:a16="http://schemas.microsoft.com/office/drawing/2014/main" id="{4C1B42D7-9239-4535-8C25-EF8AF0D9262E}"/>
+                <a16:creationId xmlns:a16="http://schemas.microsoft.com/office/drawing/2014/main" xmlns="" id="{4C1B42D7-9239-4535-8C25-EF8AF0D9262E}"/>
               </a:ext>
             </a:extLst>
           </p:cNvPr>
@@ -6303,7 +6329,7 @@
           <a:blip r:embed="rId3">
             <a:extLst>
               <a:ext uri="{28A0092B-C50C-407E-A947-70E740481C1C}">
-                <a14:useLocalDpi xmlns:a14="http://schemas.microsoft.com/office/drawing/2010/main" val="0"/>
+                <a14:useLocalDpi xmlns:a14="http://schemas.microsoft.com/office/drawing/2010/main" xmlns="" val="0"/>
               </a:ext>
             </a:extLst>
           </a:blip>
@@ -6326,14 +6352,14 @@
           </a:ln>
           <a:extLst>
             <a:ext uri="{909E8E84-426E-40DD-AFC4-6F175D3DCCD1}">
-              <a14:hiddenFill xmlns:a14="http://schemas.microsoft.com/office/drawing/2010/main">
+              <a14:hiddenFill xmlns:a14="http://schemas.microsoft.com/office/drawing/2010/main" xmlns="">
                 <a:solidFill>
                   <a:srgbClr val="FFFFFF"/>
                 </a:solidFill>
               </a14:hiddenFill>
             </a:ext>
             <a:ext uri="{91240B29-F687-4F45-9708-019B960494DF}">
-              <a14:hiddenLine xmlns:a14="http://schemas.microsoft.com/office/drawing/2010/main" w="9525">
+              <a14:hiddenLine xmlns:a14="http://schemas.microsoft.com/office/drawing/2010/main" xmlns="" w="9525">
                 <a:solidFill>
                   <a:srgbClr val="000000"/>
                 </a:solidFill>
@@ -6350,7 +6376,7 @@
           <p:cNvPr id="2" name="TextBox 1">
             <a:extLst>
               <a:ext uri="{FF2B5EF4-FFF2-40B4-BE49-F238E27FC236}">
-                <a16:creationId xmlns:a16="http://schemas.microsoft.com/office/drawing/2014/main" id="{57519650-4D5E-45C9-BCF6-B2C0554D33E2}"/>
+                <a16:creationId xmlns:a16="http://schemas.microsoft.com/office/drawing/2014/main" xmlns="" id="{57519650-4D5E-45C9-BCF6-B2C0554D33E2}"/>
               </a:ext>
             </a:extLst>
           </p:cNvPr>
@@ -6467,7 +6493,7 @@
           <p:cNvPr id="24578" name="Rectangle 2">
             <a:extLst>
               <a:ext uri="{FF2B5EF4-FFF2-40B4-BE49-F238E27FC236}">
-                <a16:creationId xmlns:a16="http://schemas.microsoft.com/office/drawing/2014/main" id="{18D9066D-6E62-480A-A448-F88C6FB241E9}"/>
+                <a16:creationId xmlns:a16="http://schemas.microsoft.com/office/drawing/2014/main" xmlns="" id="{18D9066D-6E62-480A-A448-F88C6FB241E9}"/>
               </a:ext>
             </a:extLst>
           </p:cNvPr>
@@ -6503,7 +6529,7 @@
           <p:cNvPr id="24579" name="Rectangle 3">
             <a:extLst>
               <a:ext uri="{FF2B5EF4-FFF2-40B4-BE49-F238E27FC236}">
-                <a16:creationId xmlns:a16="http://schemas.microsoft.com/office/drawing/2014/main" id="{5FE53719-71CB-4158-A535-768E646E48D7}"/>
+                <a16:creationId xmlns:a16="http://schemas.microsoft.com/office/drawing/2014/main" xmlns="" id="{5FE53719-71CB-4158-A535-768E646E48D7}"/>
               </a:ext>
             </a:extLst>
           </p:cNvPr>
@@ -6603,7 +6629,7 @@
           <p:cNvPr id="26626" name="Title 1">
             <a:extLst>
               <a:ext uri="{FF2B5EF4-FFF2-40B4-BE49-F238E27FC236}">
-                <a16:creationId xmlns:a16="http://schemas.microsoft.com/office/drawing/2014/main" id="{249B161E-EAED-4DCF-B609-D8AB274D0369}"/>
+                <a16:creationId xmlns:a16="http://schemas.microsoft.com/office/drawing/2014/main" xmlns="" id="{249B161E-EAED-4DCF-B609-D8AB274D0369}"/>
               </a:ext>
             </a:extLst>
           </p:cNvPr>
@@ -6638,7 +6664,7 @@
           <p:cNvPr id="26627" name="Content Placeholder 2">
             <a:extLst>
               <a:ext uri="{FF2B5EF4-FFF2-40B4-BE49-F238E27FC236}">
-                <a16:creationId xmlns:a16="http://schemas.microsoft.com/office/drawing/2014/main" id="{1363C44F-7AD0-4380-824D-C4E77F3B346A}"/>
+                <a16:creationId xmlns:a16="http://schemas.microsoft.com/office/drawing/2014/main" xmlns="" id="{1363C44F-7AD0-4380-824D-C4E77F3B346A}"/>
               </a:ext>
             </a:extLst>
           </p:cNvPr>
@@ -6674,6 +6700,12 @@
               <a:buFont typeface="Monotype Sorts" pitchFamily="-84" charset="2"/>
               <a:buNone/>
             </a:pPr>
+            <a:r>
+              <a:rPr lang="en-US" altLang="en-US">
+                <a:latin typeface="Courier New" panose="02070309020205020404" pitchFamily="49" charset="0"/>
+              </a:rPr>
+              <a:t/>
+            </a:r>
             <a:br>
               <a:rPr lang="en-US" altLang="en-US">
                 <a:latin typeface="Courier New" panose="02070309020205020404" pitchFamily="49" charset="0"/>
@@ -6786,7 +6818,7 @@
           <p:cNvPr id="26628" name="Picture 1">
             <a:extLst>
               <a:ext uri="{FF2B5EF4-FFF2-40B4-BE49-F238E27FC236}">
-                <a16:creationId xmlns:a16="http://schemas.microsoft.com/office/drawing/2014/main" id="{93AD06B9-FDEF-4097-849B-AE5BDEF25F0B}"/>
+                <a16:creationId xmlns:a16="http://schemas.microsoft.com/office/drawing/2014/main" xmlns="" id="{93AD06B9-FDEF-4097-849B-AE5BDEF25F0B}"/>
               </a:ext>
             </a:extLst>
           </p:cNvPr>
@@ -6796,10 +6828,10 @@
           <p:nvPr/>
         </p:nvPicPr>
         <p:blipFill>
-          <a:blip r:embed="rId2">
+          <a:blip r:embed="rId2" cstate="print">
             <a:extLst>
               <a:ext uri="{28A0092B-C50C-407E-A947-70E740481C1C}">
-                <a14:useLocalDpi xmlns:a14="http://schemas.microsoft.com/office/drawing/2010/main" val="0"/>
+                <a14:useLocalDpi xmlns:a14="http://schemas.microsoft.com/office/drawing/2010/main" xmlns="" val="0"/>
               </a:ext>
             </a:extLst>
           </a:blip>
@@ -6822,14 +6854,14 @@
           </a:ln>
           <a:extLst>
             <a:ext uri="{909E8E84-426E-40DD-AFC4-6F175D3DCCD1}">
-              <a14:hiddenFill xmlns:a14="http://schemas.microsoft.com/office/drawing/2010/main">
+              <a14:hiddenFill xmlns:a14="http://schemas.microsoft.com/office/drawing/2010/main" xmlns="">
                 <a:solidFill>
                   <a:srgbClr val="FFFFFF"/>
                 </a:solidFill>
               </a14:hiddenFill>
             </a:ext>
             <a:ext uri="{91240B29-F687-4F45-9708-019B960494DF}">
-              <a14:hiddenLine xmlns:a14="http://schemas.microsoft.com/office/drawing/2010/main" w="9525">
+              <a14:hiddenLine xmlns:a14="http://schemas.microsoft.com/office/drawing/2010/main" xmlns="" w="9525">
                 <a:solidFill>
                   <a:srgbClr val="000000"/>
                 </a:solidFill>
@@ -6871,7 +6903,7 @@
           <p:cNvPr id="27650" name="Rectangle 2">
             <a:extLst>
               <a:ext uri="{FF2B5EF4-FFF2-40B4-BE49-F238E27FC236}">
-                <a16:creationId xmlns:a16="http://schemas.microsoft.com/office/drawing/2014/main" id="{76D14E00-AC36-46B6-804B-3B1E61B7A1F4}"/>
+                <a16:creationId xmlns:a16="http://schemas.microsoft.com/office/drawing/2014/main" xmlns="" id="{76D14E00-AC36-46B6-804B-3B1E61B7A1F4}"/>
               </a:ext>
             </a:extLst>
           </p:cNvPr>
@@ -6907,7 +6939,7 @@
           <p:cNvPr id="27651" name="Rectangle 3">
             <a:extLst>
               <a:ext uri="{FF2B5EF4-FFF2-40B4-BE49-F238E27FC236}">
-                <a16:creationId xmlns:a16="http://schemas.microsoft.com/office/drawing/2014/main" id="{CD9E4484-1299-4947-B075-F0D9269BBD17}"/>
+                <a16:creationId xmlns:a16="http://schemas.microsoft.com/office/drawing/2014/main" xmlns="" id="{CD9E4484-1299-4947-B075-F0D9269BBD17}"/>
               </a:ext>
             </a:extLst>
           </p:cNvPr>
@@ -6926,7 +6958,7 @@
         </p:spPr>
         <p:txBody>
           <a:bodyPr>
-            <a:normAutofit fontScale="92500" lnSpcReduction="10000"/>
+            <a:normAutofit fontScale="85000" lnSpcReduction="10000"/>
           </a:bodyPr>
           <a:lstStyle/>
           <a:p>
@@ -7154,7 +7186,7 @@
           <p:cNvPr id="29698" name="Rectangle 2">
             <a:extLst>
               <a:ext uri="{FF2B5EF4-FFF2-40B4-BE49-F238E27FC236}">
-                <a16:creationId xmlns:a16="http://schemas.microsoft.com/office/drawing/2014/main" id="{C79FFB59-5D7F-4075-B911-2B593B51732C}"/>
+                <a16:creationId xmlns:a16="http://schemas.microsoft.com/office/drawing/2014/main" xmlns="" id="{C79FFB59-5D7F-4075-B911-2B593B51732C}"/>
               </a:ext>
             </a:extLst>
           </p:cNvPr>
@@ -7190,7 +7222,7 @@
           <p:cNvPr id="29699" name="Picture 1">
             <a:extLst>
               <a:ext uri="{FF2B5EF4-FFF2-40B4-BE49-F238E27FC236}">
-                <a16:creationId xmlns:a16="http://schemas.microsoft.com/office/drawing/2014/main" id="{BCBD9C55-CB2E-45AE-A528-0022312EC977}"/>
+                <a16:creationId xmlns:a16="http://schemas.microsoft.com/office/drawing/2014/main" xmlns="" id="{BCBD9C55-CB2E-45AE-A528-0022312EC977}"/>
               </a:ext>
             </a:extLst>
           </p:cNvPr>
@@ -7200,10 +7232,10 @@
           <p:nvPr/>
         </p:nvPicPr>
         <p:blipFill>
-          <a:blip r:embed="rId3">
+          <a:blip r:embed="rId3" cstate="print">
             <a:extLst>
               <a:ext uri="{28A0092B-C50C-407E-A947-70E740481C1C}">
-                <a14:useLocalDpi xmlns:a14="http://schemas.microsoft.com/office/drawing/2010/main" val="0"/>
+                <a14:useLocalDpi xmlns:a14="http://schemas.microsoft.com/office/drawing/2010/main" xmlns="" val="0"/>
               </a:ext>
             </a:extLst>
           </a:blip>
@@ -7226,14 +7258,14 @@
           </a:ln>
           <a:extLst>
             <a:ext uri="{909E8E84-426E-40DD-AFC4-6F175D3DCCD1}">
-              <a14:hiddenFill xmlns:a14="http://schemas.microsoft.com/office/drawing/2010/main">
+              <a14:hiddenFill xmlns:a14="http://schemas.microsoft.com/office/drawing/2010/main" xmlns="">
                 <a:solidFill>
                   <a:srgbClr val="FFFFFF"/>
                 </a:solidFill>
               </a14:hiddenFill>
             </a:ext>
             <a:ext uri="{91240B29-F687-4F45-9708-019B960494DF}">
-              <a14:hiddenLine xmlns:a14="http://schemas.microsoft.com/office/drawing/2010/main" w="9525">
+              <a14:hiddenLine xmlns:a14="http://schemas.microsoft.com/office/drawing/2010/main" xmlns="" w="9525">
                 <a:solidFill>
                   <a:srgbClr val="000000"/>
                 </a:solidFill>
@@ -7275,7 +7307,7 @@
           <p:cNvPr id="31746" name="Rectangle 2">
             <a:extLst>
               <a:ext uri="{FF2B5EF4-FFF2-40B4-BE49-F238E27FC236}">
-                <a16:creationId xmlns:a16="http://schemas.microsoft.com/office/drawing/2014/main" id="{38DB7F06-1635-4E8A-B106-08B7519EA753}"/>
+                <a16:creationId xmlns:a16="http://schemas.microsoft.com/office/drawing/2014/main" xmlns="" id="{38DB7F06-1635-4E8A-B106-08B7519EA753}"/>
               </a:ext>
             </a:extLst>
           </p:cNvPr>
@@ -7311,7 +7343,7 @@
           <p:cNvPr id="31747" name="Picture 2">
             <a:extLst>
               <a:ext uri="{FF2B5EF4-FFF2-40B4-BE49-F238E27FC236}">
-                <a16:creationId xmlns:a16="http://schemas.microsoft.com/office/drawing/2014/main" id="{A0A8D57B-B011-4BA3-A330-AE3AFD4CB52A}"/>
+                <a16:creationId xmlns:a16="http://schemas.microsoft.com/office/drawing/2014/main" xmlns="" id="{A0A8D57B-B011-4BA3-A330-AE3AFD4CB52A}"/>
               </a:ext>
             </a:extLst>
           </p:cNvPr>
@@ -7321,10 +7353,10 @@
           <p:nvPr/>
         </p:nvPicPr>
         <p:blipFill>
-          <a:blip r:embed="rId3">
+          <a:blip r:embed="rId3" cstate="print">
             <a:extLst>
               <a:ext uri="{28A0092B-C50C-407E-A947-70E740481C1C}">
-                <a14:useLocalDpi xmlns:a14="http://schemas.microsoft.com/office/drawing/2010/main" val="0"/>
+                <a14:useLocalDpi xmlns:a14="http://schemas.microsoft.com/office/drawing/2010/main" xmlns="" val="0"/>
               </a:ext>
             </a:extLst>
           </a:blip>
@@ -7347,14 +7379,14 @@
           </a:ln>
           <a:extLst>
             <a:ext uri="{909E8E84-426E-40DD-AFC4-6F175D3DCCD1}">
-              <a14:hiddenFill xmlns:a14="http://schemas.microsoft.com/office/drawing/2010/main">
+              <a14:hiddenFill xmlns:a14="http://schemas.microsoft.com/office/drawing/2010/main" xmlns="">
                 <a:solidFill>
                   <a:srgbClr val="FFFFFF"/>
                 </a:solidFill>
               </a14:hiddenFill>
             </a:ext>
             <a:ext uri="{91240B29-F687-4F45-9708-019B960494DF}">
-              <a14:hiddenLine xmlns:a14="http://schemas.microsoft.com/office/drawing/2010/main" w="9525">
+              <a14:hiddenLine xmlns:a14="http://schemas.microsoft.com/office/drawing/2010/main" xmlns="" w="9525">
                 <a:solidFill>
                   <a:srgbClr val="000000"/>
                 </a:solidFill>
@@ -7396,7 +7428,7 @@
           <p:cNvPr id="33794" name="Rectangle 2">
             <a:extLst>
               <a:ext uri="{FF2B5EF4-FFF2-40B4-BE49-F238E27FC236}">
-                <a16:creationId xmlns:a16="http://schemas.microsoft.com/office/drawing/2014/main" id="{4294884C-D89B-43C5-8278-E1AFFD1E5DD1}"/>
+                <a16:creationId xmlns:a16="http://schemas.microsoft.com/office/drawing/2014/main" xmlns="" id="{4294884C-D89B-43C5-8278-E1AFFD1E5DD1}"/>
               </a:ext>
             </a:extLst>
           </p:cNvPr>
@@ -7432,7 +7464,7 @@
           <p:cNvPr id="33795" name="TextBox 1">
             <a:extLst>
               <a:ext uri="{FF2B5EF4-FFF2-40B4-BE49-F238E27FC236}">
-                <a16:creationId xmlns:a16="http://schemas.microsoft.com/office/drawing/2014/main" id="{2AC6A249-89C1-4E3A-A92E-5E91F7A23743}"/>
+                <a16:creationId xmlns:a16="http://schemas.microsoft.com/office/drawing/2014/main" xmlns="" id="{2AC6A249-89C1-4E3A-A92E-5E91F7A23743}"/>
               </a:ext>
             </a:extLst>
           </p:cNvPr>
@@ -7455,14 +7487,14 @@
           </a:ln>
           <a:extLst>
             <a:ext uri="{909E8E84-426E-40DD-AFC4-6F175D3DCCD1}">
-              <a14:hiddenFill xmlns:a14="http://schemas.microsoft.com/office/drawing/2010/main">
+              <a14:hiddenFill xmlns:a14="http://schemas.microsoft.com/office/drawing/2010/main" xmlns="">
                 <a:solidFill>
                   <a:srgbClr val="FFFFFF"/>
                 </a:solidFill>
               </a14:hiddenFill>
             </a:ext>
             <a:ext uri="{91240B29-F687-4F45-9708-019B960494DF}">
-              <a14:hiddenLine xmlns:a14="http://schemas.microsoft.com/office/drawing/2010/main" w="9525">
+              <a14:hiddenLine xmlns:a14="http://schemas.microsoft.com/office/drawing/2010/main" xmlns="" w="9525">
                 <a:solidFill>
                   <a:srgbClr val="000000"/>
                 </a:solidFill>
@@ -7683,7 +7715,7 @@
           <p:cNvPr id="33796" name="Picture 1">
             <a:extLst>
               <a:ext uri="{FF2B5EF4-FFF2-40B4-BE49-F238E27FC236}">
-                <a16:creationId xmlns:a16="http://schemas.microsoft.com/office/drawing/2014/main" id="{81BF3499-8F25-4834-B5FB-DDAE904111AE}"/>
+                <a16:creationId xmlns:a16="http://schemas.microsoft.com/office/drawing/2014/main" xmlns="" id="{81BF3499-8F25-4834-B5FB-DDAE904111AE}"/>
               </a:ext>
             </a:extLst>
           </p:cNvPr>
@@ -7693,10 +7725,10 @@
           <p:nvPr/>
         </p:nvPicPr>
         <p:blipFill>
-          <a:blip r:embed="rId3">
+          <a:blip r:embed="rId3" cstate="print">
             <a:extLst>
               <a:ext uri="{28A0092B-C50C-407E-A947-70E740481C1C}">
-                <a14:useLocalDpi xmlns:a14="http://schemas.microsoft.com/office/drawing/2010/main" val="0"/>
+                <a14:useLocalDpi xmlns:a14="http://schemas.microsoft.com/office/drawing/2010/main" xmlns="" val="0"/>
               </a:ext>
             </a:extLst>
           </a:blip>
@@ -7719,14 +7751,14 @@
           </a:ln>
           <a:extLst>
             <a:ext uri="{909E8E84-426E-40DD-AFC4-6F175D3DCCD1}">
-              <a14:hiddenFill xmlns:a14="http://schemas.microsoft.com/office/drawing/2010/main">
+              <a14:hiddenFill xmlns:a14="http://schemas.microsoft.com/office/drawing/2010/main" xmlns="">
                 <a:solidFill>
                   <a:srgbClr val="FFFFFF"/>
                 </a:solidFill>
               </a14:hiddenFill>
             </a:ext>
             <a:ext uri="{91240B29-F687-4F45-9708-019B960494DF}">
-              <a14:hiddenLine xmlns:a14="http://schemas.microsoft.com/office/drawing/2010/main" w="9525">
+              <a14:hiddenLine xmlns:a14="http://schemas.microsoft.com/office/drawing/2010/main" xmlns="" w="9525">
                 <a:solidFill>
                   <a:srgbClr val="000000"/>
                 </a:solidFill>
@@ -7768,7 +7800,7 @@
           <p:cNvPr id="35842" name="Rectangle 2">
             <a:extLst>
               <a:ext uri="{FF2B5EF4-FFF2-40B4-BE49-F238E27FC236}">
-                <a16:creationId xmlns:a16="http://schemas.microsoft.com/office/drawing/2014/main" id="{569EF2C8-62D9-4AD3-A3DB-7E8B03141FB3}"/>
+                <a16:creationId xmlns:a16="http://schemas.microsoft.com/office/drawing/2014/main" xmlns="" id="{569EF2C8-62D9-4AD3-A3DB-7E8B03141FB3}"/>
               </a:ext>
             </a:extLst>
           </p:cNvPr>
@@ -7804,7 +7836,7 @@
           <p:cNvPr id="35843" name="Rectangle 3">
             <a:extLst>
               <a:ext uri="{FF2B5EF4-FFF2-40B4-BE49-F238E27FC236}">
-                <a16:creationId xmlns:a16="http://schemas.microsoft.com/office/drawing/2014/main" id="{BFE77FD9-7213-4CFD-BE76-B9508F46FB81}"/>
+                <a16:creationId xmlns:a16="http://schemas.microsoft.com/office/drawing/2014/main" xmlns="" id="{BFE77FD9-7213-4CFD-BE76-B9508F46FB81}"/>
               </a:ext>
             </a:extLst>
           </p:cNvPr>
@@ -7823,7 +7855,7 @@
         </p:spPr>
         <p:txBody>
           <a:bodyPr>
-            <a:normAutofit fontScale="92500" lnSpcReduction="20000"/>
+            <a:normAutofit fontScale="85000" lnSpcReduction="10000"/>
           </a:bodyPr>
           <a:lstStyle/>
           <a:p>
@@ -8060,7 +8092,7 @@
           <p:cNvPr id="39938" name="Rectangle 2">
             <a:extLst>
               <a:ext uri="{FF2B5EF4-FFF2-40B4-BE49-F238E27FC236}">
-                <a16:creationId xmlns:a16="http://schemas.microsoft.com/office/drawing/2014/main" id="{ED9C18A1-E10D-464E-ADF5-DBECC2503EA1}"/>
+                <a16:creationId xmlns:a16="http://schemas.microsoft.com/office/drawing/2014/main" xmlns="" id="{ED9C18A1-E10D-464E-ADF5-DBECC2503EA1}"/>
               </a:ext>
             </a:extLst>
           </p:cNvPr>
@@ -8096,7 +8128,7 @@
           <p:cNvPr id="39939" name="Rectangle 3">
             <a:extLst>
               <a:ext uri="{FF2B5EF4-FFF2-40B4-BE49-F238E27FC236}">
-                <a16:creationId xmlns:a16="http://schemas.microsoft.com/office/drawing/2014/main" id="{1EED5598-4581-4F9D-8CEF-0D1A5A5544B9}"/>
+                <a16:creationId xmlns:a16="http://schemas.microsoft.com/office/drawing/2014/main" xmlns="" id="{1EED5598-4581-4F9D-8CEF-0D1A5A5544B9}"/>
               </a:ext>
             </a:extLst>
           </p:cNvPr>
@@ -8168,7 +8200,7 @@
           <p:cNvPr id="41986" name="Rectangle 2">
             <a:extLst>
               <a:ext uri="{FF2B5EF4-FFF2-40B4-BE49-F238E27FC236}">
-                <a16:creationId xmlns:a16="http://schemas.microsoft.com/office/drawing/2014/main" id="{C072917A-2F04-4923-8279-E4AEA8CC4538}"/>
+                <a16:creationId xmlns:a16="http://schemas.microsoft.com/office/drawing/2014/main" xmlns="" id="{C072917A-2F04-4923-8279-E4AEA8CC4538}"/>
               </a:ext>
             </a:extLst>
           </p:cNvPr>
@@ -8204,7 +8236,7 @@
           <p:cNvPr id="41987" name="Rectangle 3">
             <a:extLst>
               <a:ext uri="{FF2B5EF4-FFF2-40B4-BE49-F238E27FC236}">
-                <a16:creationId xmlns:a16="http://schemas.microsoft.com/office/drawing/2014/main" id="{D7F79436-9B7B-4340-B99C-8D1E088896F0}"/>
+                <a16:creationId xmlns:a16="http://schemas.microsoft.com/office/drawing/2014/main" xmlns="" id="{D7F79436-9B7B-4340-B99C-8D1E088896F0}"/>
               </a:ext>
             </a:extLst>
           </p:cNvPr>
@@ -8433,7 +8465,7 @@
           <p:cNvPr id="7170" name="Rectangle 2">
             <a:extLst>
               <a:ext uri="{FF2B5EF4-FFF2-40B4-BE49-F238E27FC236}">
-                <a16:creationId xmlns:a16="http://schemas.microsoft.com/office/drawing/2014/main" id="{43F2AA79-94D9-4276-9C41-F8DFF3001472}"/>
+                <a16:creationId xmlns:a16="http://schemas.microsoft.com/office/drawing/2014/main" xmlns="" id="{43F2AA79-94D9-4276-9C41-F8DFF3001472}"/>
               </a:ext>
             </a:extLst>
           </p:cNvPr>
@@ -8469,7 +8501,7 @@
           <p:cNvPr id="7171" name="Rectangle 3">
             <a:extLst>
               <a:ext uri="{FF2B5EF4-FFF2-40B4-BE49-F238E27FC236}">
-                <a16:creationId xmlns:a16="http://schemas.microsoft.com/office/drawing/2014/main" id="{5C7B4A6B-A9B9-465A-90EA-66F577052347}"/>
+                <a16:creationId xmlns:a16="http://schemas.microsoft.com/office/drawing/2014/main" xmlns="" id="{5C7B4A6B-A9B9-465A-90EA-66F577052347}"/>
               </a:ext>
             </a:extLst>
           </p:cNvPr>
@@ -8559,7 +8591,7 @@
           <p:cNvPr id="46082" name="Rectangle 2">
             <a:extLst>
               <a:ext uri="{FF2B5EF4-FFF2-40B4-BE49-F238E27FC236}">
-                <a16:creationId xmlns:a16="http://schemas.microsoft.com/office/drawing/2014/main" id="{BAE43D30-47DB-4A10-9067-ED0817C05E25}"/>
+                <a16:creationId xmlns:a16="http://schemas.microsoft.com/office/drawing/2014/main" xmlns="" id="{BAE43D30-47DB-4A10-9067-ED0817C05E25}"/>
               </a:ext>
             </a:extLst>
           </p:cNvPr>
@@ -8595,7 +8627,7 @@
           <p:cNvPr id="46083" name="Rectangle 3">
             <a:extLst>
               <a:ext uri="{FF2B5EF4-FFF2-40B4-BE49-F238E27FC236}">
-                <a16:creationId xmlns:a16="http://schemas.microsoft.com/office/drawing/2014/main" id="{5A61E917-5669-429F-AA78-E90F2FCB894C}"/>
+                <a16:creationId xmlns:a16="http://schemas.microsoft.com/office/drawing/2014/main" xmlns="" id="{5A61E917-5669-429F-AA78-E90F2FCB894C}"/>
               </a:ext>
             </a:extLst>
           </p:cNvPr>
@@ -8734,7 +8766,7 @@
           <p:cNvPr id="46084" name="Picture 1">
             <a:extLst>
               <a:ext uri="{FF2B5EF4-FFF2-40B4-BE49-F238E27FC236}">
-                <a16:creationId xmlns:a16="http://schemas.microsoft.com/office/drawing/2014/main" id="{568A0721-FDA4-4095-BD34-B36CF2AB0A74}"/>
+                <a16:creationId xmlns:a16="http://schemas.microsoft.com/office/drawing/2014/main" xmlns="" id="{568A0721-FDA4-4095-BD34-B36CF2AB0A74}"/>
               </a:ext>
             </a:extLst>
           </p:cNvPr>
@@ -8744,10 +8776,10 @@
           <p:nvPr/>
         </p:nvPicPr>
         <p:blipFill>
-          <a:blip r:embed="rId3">
+          <a:blip r:embed="rId3" cstate="print">
             <a:extLst>
               <a:ext uri="{28A0092B-C50C-407E-A947-70E740481C1C}">
-                <a14:useLocalDpi xmlns:a14="http://schemas.microsoft.com/office/drawing/2010/main" val="0"/>
+                <a14:useLocalDpi xmlns:a14="http://schemas.microsoft.com/office/drawing/2010/main" xmlns="" val="0"/>
               </a:ext>
             </a:extLst>
           </a:blip>
@@ -8770,14 +8802,14 @@
           </a:ln>
           <a:extLst>
             <a:ext uri="{909E8E84-426E-40DD-AFC4-6F175D3DCCD1}">
-              <a14:hiddenFill xmlns:a14="http://schemas.microsoft.com/office/drawing/2010/main">
+              <a14:hiddenFill xmlns:a14="http://schemas.microsoft.com/office/drawing/2010/main" xmlns="">
                 <a:solidFill>
                   <a:srgbClr val="FFFFFF"/>
                 </a:solidFill>
               </a14:hiddenFill>
             </a:ext>
             <a:ext uri="{91240B29-F687-4F45-9708-019B960494DF}">
-              <a14:hiddenLine xmlns:a14="http://schemas.microsoft.com/office/drawing/2010/main" w="9525">
+              <a14:hiddenLine xmlns:a14="http://schemas.microsoft.com/office/drawing/2010/main" xmlns="" w="9525">
                 <a:solidFill>
                   <a:srgbClr val="000000"/>
                 </a:solidFill>
@@ -8819,7 +8851,7 @@
           <p:cNvPr id="44034" name="Rectangle 2">
             <a:extLst>
               <a:ext uri="{FF2B5EF4-FFF2-40B4-BE49-F238E27FC236}">
-                <a16:creationId xmlns:a16="http://schemas.microsoft.com/office/drawing/2014/main" id="{039237D4-E7AC-45FA-BF2A-B2DEBB1756B7}"/>
+                <a16:creationId xmlns:a16="http://schemas.microsoft.com/office/drawing/2014/main" xmlns="" id="{039237D4-E7AC-45FA-BF2A-B2DEBB1756B7}"/>
               </a:ext>
             </a:extLst>
           </p:cNvPr>
@@ -8855,7 +8887,7 @@
           <p:cNvPr id="44035" name="Picture 1">
             <a:extLst>
               <a:ext uri="{FF2B5EF4-FFF2-40B4-BE49-F238E27FC236}">
-                <a16:creationId xmlns:a16="http://schemas.microsoft.com/office/drawing/2014/main" id="{EA22965C-6F67-436A-9A7E-32781923A7CF}"/>
+                <a16:creationId xmlns:a16="http://schemas.microsoft.com/office/drawing/2014/main" xmlns="" id="{EA22965C-6F67-436A-9A7E-32781923A7CF}"/>
               </a:ext>
             </a:extLst>
           </p:cNvPr>
@@ -8865,10 +8897,10 @@
           <p:nvPr/>
         </p:nvPicPr>
         <p:blipFill>
-          <a:blip r:embed="rId3">
+          <a:blip r:embed="rId3" cstate="print">
             <a:extLst>
               <a:ext uri="{28A0092B-C50C-407E-A947-70E740481C1C}">
-                <a14:useLocalDpi xmlns:a14="http://schemas.microsoft.com/office/drawing/2010/main" val="0"/>
+                <a14:useLocalDpi xmlns:a14="http://schemas.microsoft.com/office/drawing/2010/main" xmlns="" val="0"/>
               </a:ext>
             </a:extLst>
           </a:blip>
@@ -8891,14 +8923,14 @@
           </a:ln>
           <a:extLst>
             <a:ext uri="{909E8E84-426E-40DD-AFC4-6F175D3DCCD1}">
-              <a14:hiddenFill xmlns:a14="http://schemas.microsoft.com/office/drawing/2010/main">
+              <a14:hiddenFill xmlns:a14="http://schemas.microsoft.com/office/drawing/2010/main" xmlns="">
                 <a:solidFill>
                   <a:srgbClr val="FFFFFF"/>
                 </a:solidFill>
               </a14:hiddenFill>
             </a:ext>
             <a:ext uri="{91240B29-F687-4F45-9708-019B960494DF}">
-              <a14:hiddenLine xmlns:a14="http://schemas.microsoft.com/office/drawing/2010/main" w="9525">
+              <a14:hiddenLine xmlns:a14="http://schemas.microsoft.com/office/drawing/2010/main" xmlns="" w="9525">
                 <a:solidFill>
                   <a:srgbClr val="000000"/>
                 </a:solidFill>
@@ -8913,7 +8945,7 @@
     </p:spTree>
     <p:extLst>
       <p:ext uri="{BB962C8B-B14F-4D97-AF65-F5344CB8AC3E}">
-        <p14:creationId xmlns:p14="http://schemas.microsoft.com/office/powerpoint/2010/main" val="4083909626"/>
+        <p14:creationId xmlns:p14="http://schemas.microsoft.com/office/powerpoint/2010/main" xmlns="" val="4083909626"/>
       </p:ext>
     </p:extLst>
   </p:cSld>
@@ -8945,7 +8977,7 @@
           <p:cNvPr id="48130" name="Rectangle 2">
             <a:extLst>
               <a:ext uri="{FF2B5EF4-FFF2-40B4-BE49-F238E27FC236}">
-                <a16:creationId xmlns:a16="http://schemas.microsoft.com/office/drawing/2014/main" id="{CE1AA525-61E4-4CE5-B1B8-BBEC4CC5E094}"/>
+                <a16:creationId xmlns:a16="http://schemas.microsoft.com/office/drawing/2014/main" xmlns="" id="{CE1AA525-61E4-4CE5-B1B8-BBEC4CC5E094}"/>
               </a:ext>
             </a:extLst>
           </p:cNvPr>
@@ -8981,7 +9013,7 @@
           <p:cNvPr id="48131" name="Picture 5" descr="Screen Shot 2012-12-04 at 11.21.10 AM.png">
             <a:extLst>
               <a:ext uri="{FF2B5EF4-FFF2-40B4-BE49-F238E27FC236}">
-                <a16:creationId xmlns:a16="http://schemas.microsoft.com/office/drawing/2014/main" id="{D4AAA5E2-276C-448A-B064-DFAFD902308F}"/>
+                <a16:creationId xmlns:a16="http://schemas.microsoft.com/office/drawing/2014/main" xmlns="" id="{D4AAA5E2-276C-448A-B064-DFAFD902308F}"/>
               </a:ext>
             </a:extLst>
           </p:cNvPr>
@@ -8994,7 +9026,7 @@
           <a:blip r:embed="rId3">
             <a:extLst>
               <a:ext uri="{28A0092B-C50C-407E-A947-70E740481C1C}">
-                <a14:useLocalDpi xmlns:a14="http://schemas.microsoft.com/office/drawing/2010/main" val="0"/>
+                <a14:useLocalDpi xmlns:a14="http://schemas.microsoft.com/office/drawing/2010/main" xmlns="" val="0"/>
               </a:ext>
             </a:extLst>
           </a:blip>
@@ -9017,14 +9049,14 @@
           </a:ln>
           <a:extLst>
             <a:ext uri="{909E8E84-426E-40DD-AFC4-6F175D3DCCD1}">
-              <a14:hiddenFill xmlns:a14="http://schemas.microsoft.com/office/drawing/2010/main">
+              <a14:hiddenFill xmlns:a14="http://schemas.microsoft.com/office/drawing/2010/main" xmlns="">
                 <a:solidFill>
                   <a:srgbClr val="FFFFFF"/>
                 </a:solidFill>
               </a14:hiddenFill>
             </a:ext>
             <a:ext uri="{91240B29-F687-4F45-9708-019B960494DF}">
-              <a14:hiddenLine xmlns:a14="http://schemas.microsoft.com/office/drawing/2010/main" w="9525">
+              <a14:hiddenLine xmlns:a14="http://schemas.microsoft.com/office/drawing/2010/main" xmlns="" w="9525">
                 <a:solidFill>
                   <a:srgbClr val="000000"/>
                 </a:solidFill>
@@ -9066,7 +9098,7 @@
           <p:cNvPr id="50178" name="Rectangle 2">
             <a:extLst>
               <a:ext uri="{FF2B5EF4-FFF2-40B4-BE49-F238E27FC236}">
-                <a16:creationId xmlns:a16="http://schemas.microsoft.com/office/drawing/2014/main" id="{0F4113AE-3A57-4A41-B077-3753934F4615}"/>
+                <a16:creationId xmlns:a16="http://schemas.microsoft.com/office/drawing/2014/main" xmlns="" id="{0F4113AE-3A57-4A41-B077-3753934F4615}"/>
               </a:ext>
             </a:extLst>
           </p:cNvPr>
@@ -9100,7 +9132,7 @@
           <p:cNvPr id="50179" name="Picture 1" descr="Screen Shot 2012-12-04 at 11.23.48 AM.png">
             <a:extLst>
               <a:ext uri="{FF2B5EF4-FFF2-40B4-BE49-F238E27FC236}">
-                <a16:creationId xmlns:a16="http://schemas.microsoft.com/office/drawing/2014/main" id="{92929ABB-1259-4492-BE46-EE3BC21BF5C9}"/>
+                <a16:creationId xmlns:a16="http://schemas.microsoft.com/office/drawing/2014/main" xmlns="" id="{92929ABB-1259-4492-BE46-EE3BC21BF5C9}"/>
               </a:ext>
             </a:extLst>
           </p:cNvPr>
@@ -9113,7 +9145,7 @@
           <a:blip r:embed="rId3">
             <a:extLst>
               <a:ext uri="{28A0092B-C50C-407E-A947-70E740481C1C}">
-                <a14:useLocalDpi xmlns:a14="http://schemas.microsoft.com/office/drawing/2010/main" val="0"/>
+                <a14:useLocalDpi xmlns:a14="http://schemas.microsoft.com/office/drawing/2010/main" xmlns="" val="0"/>
               </a:ext>
             </a:extLst>
           </a:blip>
@@ -9136,14 +9168,14 @@
           </a:ln>
           <a:extLst>
             <a:ext uri="{909E8E84-426E-40DD-AFC4-6F175D3DCCD1}">
-              <a14:hiddenFill xmlns:a14="http://schemas.microsoft.com/office/drawing/2010/main">
+              <a14:hiddenFill xmlns:a14="http://schemas.microsoft.com/office/drawing/2010/main" xmlns="">
                 <a:solidFill>
                   <a:srgbClr val="FFFFFF"/>
                 </a:solidFill>
               </a14:hiddenFill>
             </a:ext>
             <a:ext uri="{91240B29-F687-4F45-9708-019B960494DF}">
-              <a14:hiddenLine xmlns:a14="http://schemas.microsoft.com/office/drawing/2010/main" w="9525">
+              <a14:hiddenLine xmlns:a14="http://schemas.microsoft.com/office/drawing/2010/main" xmlns="" w="9525">
                 <a:solidFill>
                   <a:srgbClr val="000000"/>
                 </a:solidFill>
@@ -9182,10 +9214,10 @@
       </p:grpSpPr>
       <p:sp>
         <p:nvSpPr>
-          <p:cNvPr id="52226" name="Rectangle 2">
-            <a:extLst>
-              <a:ext uri="{FF2B5EF4-FFF2-40B4-BE49-F238E27FC236}">
-                <a16:creationId xmlns:a16="http://schemas.microsoft.com/office/drawing/2014/main" id="{B3A2AC5D-C916-47B2-8787-ACB9BD2F9B0E}"/>
+          <p:cNvPr id="54274" name="Rectangle 2">
+            <a:extLst>
+              <a:ext uri="{FF2B5EF4-FFF2-40B4-BE49-F238E27FC236}">
+                <a16:creationId xmlns:a16="http://schemas.microsoft.com/office/drawing/2014/main" xmlns="" id="{30622719-68BE-4BB0-B168-1A3AE8D09602}"/>
               </a:ext>
             </a:extLst>
           </p:cNvPr>
@@ -9198,8 +9230,8 @@
         </p:nvSpPr>
         <p:spPr>
           <a:xfrm>
-            <a:off x="1981200" y="227013"/>
-            <a:ext cx="8229600" cy="576262"/>
+            <a:off x="1981200" y="134817"/>
+            <a:ext cx="8229600" cy="576263"/>
           </a:xfrm>
         </p:spPr>
         <p:txBody>
@@ -9210,7 +9242,7 @@
           <a:p>
             <a:pPr eaLnBrk="1" hangingPunct="1"/>
             <a:r>
-              <a:rPr lang="en-US" altLang="en-US"/>
+              <a:rPr lang="en-US" altLang="en-US" dirty="0"/>
               <a:t>Process Termination</a:t>
             </a:r>
           </a:p>
@@ -9218,10 +9250,10 @@
       </p:sp>
       <p:sp>
         <p:nvSpPr>
-          <p:cNvPr id="52227" name="Rectangle 3">
-            <a:extLst>
-              <a:ext uri="{FF2B5EF4-FFF2-40B4-BE49-F238E27FC236}">
-                <a16:creationId xmlns:a16="http://schemas.microsoft.com/office/drawing/2014/main" id="{9AB8093C-E173-4473-A450-3BC8EBA8DE1B}"/>
+          <p:cNvPr id="54275" name="Rectangle 3">
+            <a:extLst>
+              <a:ext uri="{FF2B5EF4-FFF2-40B4-BE49-F238E27FC236}">
+                <a16:creationId xmlns:a16="http://schemas.microsoft.com/office/drawing/2014/main" xmlns="" id="{C7E8DAD2-CD54-4141-B861-1A2932EF060A}"/>
               </a:ext>
             </a:extLst>
           </p:cNvPr>
@@ -9234,43 +9266,51 @@
         </p:nvSpPr>
         <p:spPr>
           <a:xfrm>
-            <a:off x="2344738" y="1127982"/>
-            <a:ext cx="7303354" cy="4463927"/>
+            <a:off x="2379908" y="781418"/>
+            <a:ext cx="7033724" cy="4787045"/>
           </a:xfrm>
         </p:spPr>
         <p:txBody>
           <a:bodyPr>
-            <a:normAutofit fontScale="92500" lnSpcReduction="10000"/>
+            <a:normAutofit fontScale="77500" lnSpcReduction="20000"/>
           </a:bodyPr>
           <a:lstStyle/>
           <a:p>
-            <a:r>
-              <a:rPr lang="en-US" altLang="en-US" dirty="0"/>
-              <a:t>Process executes last statement and then asks the operating system to delete it using the </a:t>
-            </a:r>
-            <a:r>
-              <a:rPr lang="en-US" altLang="en-US" sz="2000" b="1" dirty="0">
-                <a:solidFill>
-                  <a:srgbClr val="000000"/>
-                </a:solidFill>
-                <a:latin typeface="Courier New" panose="02070309020205020404" pitchFamily="49" charset="0"/>
-              </a:rPr>
-              <a:t>exit()</a:t>
-            </a:r>
-            <a:r>
-              <a:rPr lang="en-US" altLang="en-US" sz="2000" dirty="0"/>
-              <a:t> </a:t>
-            </a:r>
-            <a:r>
-              <a:rPr lang="en-US" altLang="en-US" dirty="0"/>
-              <a:t>system call.</a:t>
+            <a:pPr marL="457200" lvl="1" indent="0">
+              <a:buNone/>
+            </a:pPr>
+            <a:endParaRPr lang="en-US" altLang="en-US" sz="800" dirty="0"/>
+          </a:p>
+          <a:p>
+            <a:r>
+              <a:rPr lang="en-US" altLang="en-US" dirty="0"/>
+              <a:t>Some operating systems do not allow child to exists if its parent has terminated.  If a process terminates, then all its children must also be terminated.</a:t>
             </a:r>
           </a:p>
           <a:p>
             <a:pPr lvl="1"/>
             <a:r>
-              <a:rPr lang="en-US" altLang="en-US" dirty="0"/>
-              <a:t>Returns  status data from child to parent (via </a:t>
+              <a:rPr lang="en-US" altLang="en-US" b="1" dirty="0"/>
+              <a:t>cascading termination.  </a:t>
+            </a:r>
+            <a:r>
+              <a:rPr lang="en-US" altLang="en-US" dirty="0"/>
+              <a:t>All children, grandchildren, etc.,  are  terminated.</a:t>
+            </a:r>
+            <a:endParaRPr lang="en-US" altLang="en-US" b="1" dirty="0"/>
+          </a:p>
+          <a:p>
+            <a:pPr lvl="1"/>
+            <a:r>
+              <a:rPr lang="en-US" altLang="en-US" dirty="0"/>
+              <a:t>The termination is initiated by the operating system.</a:t>
+            </a:r>
+            <a:endParaRPr lang="en-US" altLang="en-US" b="1" dirty="0"/>
+          </a:p>
+          <a:p>
+            <a:r>
+              <a:rPr lang="en-US" altLang="en-US" dirty="0"/>
+              <a:t>The parent process may wait for termination of a child process by using the </a:t>
             </a:r>
             <a:r>
               <a:rPr lang="en-US" altLang="en-US" sz="2000" b="1" dirty="0">
@@ -9283,67 +9323,106 @@
             </a:r>
             <a:r>
               <a:rPr lang="en-US" altLang="en-US" dirty="0"/>
-              <a:t>)</a:t>
-            </a:r>
-          </a:p>
-          <a:p>
-            <a:pPr lvl="1"/>
-            <a:r>
-              <a:rPr lang="en-US" altLang="en-US" dirty="0"/>
-              <a:t>Process</a:t>
-            </a:r>
-            <a:r>
-              <a:rPr lang="ja-JP" altLang="en-US" dirty="0"/>
-              <a:t>’</a:t>
-            </a:r>
-            <a:r>
-              <a:rPr lang="en-US" altLang="ja-JP" dirty="0"/>
-              <a:t> resources are deallocated by operating system</a:t>
-            </a:r>
-            <a:endParaRPr lang="en-US" altLang="en-US" dirty="0"/>
-          </a:p>
-          <a:p>
-            <a:r>
-              <a:rPr lang="en-US" altLang="en-US" dirty="0"/>
-              <a:t>Parent may terminate the execution of children processes  using the </a:t>
-            </a:r>
-            <a:r>
-              <a:rPr lang="en-US" altLang="en-US" sz="2000" b="1" dirty="0">
+              <a:t>system call</a:t>
+            </a:r>
+            <a:r>
+              <a:rPr lang="en-US" altLang="en-US" b="1" dirty="0">
                 <a:solidFill>
                   <a:srgbClr val="000000"/>
                 </a:solidFill>
                 <a:latin typeface="Courier New" panose="02070309020205020404" pitchFamily="49" charset="0"/>
               </a:rPr>
-              <a:t>abort()</a:t>
-            </a:r>
-            <a:r>
-              <a:rPr lang="en-US" altLang="en-US" sz="2000" dirty="0"/>
+              <a:t>. </a:t>
+            </a:r>
+            <a:r>
+              <a:rPr lang="en-US" altLang="en-US" dirty="0"/>
+              <a:t>The call returns status information and the pid of the terminated process</a:t>
+            </a:r>
+            <a:endParaRPr lang="en-US" altLang="en-US" b="1" dirty="0">
+              <a:solidFill>
+                <a:srgbClr val="000000"/>
+              </a:solidFill>
+              <a:latin typeface="Courier New" panose="02070309020205020404" pitchFamily="49" charset="0"/>
+            </a:endParaRPr>
+          </a:p>
+          <a:p>
+            <a:pPr>
+              <a:buFont typeface="Monotype Sorts" pitchFamily="-84" charset="2"/>
+              <a:buNone/>
+            </a:pPr>
+            <a:r>
+              <a:rPr lang="en-US" altLang="en-US" b="1" dirty="0">
+                <a:solidFill>
+                  <a:srgbClr val="000000"/>
+                </a:solidFill>
+                <a:latin typeface="Courier New" panose="02070309020205020404" pitchFamily="49" charset="0"/>
+              </a:rPr>
+              <a:t>      pid = wait(&amp;status); </a:t>
+            </a:r>
+          </a:p>
+          <a:p>
+            <a:r>
+              <a:rPr lang="en-US" altLang="en-US" dirty="0"/>
+              <a:t>If no parent waiting (did not invoke </a:t>
+            </a:r>
+            <a:r>
+              <a:rPr lang="en-US" altLang="en-US" sz="2000" b="1" dirty="0">
+                <a:solidFill>
+                  <a:srgbClr val="000000"/>
+                </a:solidFill>
+                <a:latin typeface="Courier New" panose="02070309020205020404" pitchFamily="49" charset="0"/>
+              </a:rPr>
+              <a:t>wait()</a:t>
+            </a:r>
+            <a:r>
+              <a:rPr lang="en-US" altLang="en-US" dirty="0"/>
+              <a:t>) process is a </a:t>
+            </a:r>
+            <a:r>
+              <a:rPr lang="en-US" altLang="en-US" b="1" dirty="0">
+                <a:solidFill>
+                  <a:srgbClr val="006699"/>
+                </a:solidFill>
+                <a:latin typeface="+mj-lt"/>
+              </a:rPr>
+              <a:t>zombie</a:t>
+            </a:r>
+          </a:p>
+          <a:p>
+            <a:r>
+              <a:rPr lang="en-US" altLang="en-US" dirty="0"/>
+              <a:t>If parent terminated without invoking</a:t>
+            </a:r>
+            <a:r>
+              <a:rPr lang="en-US" altLang="en-US" b="1" dirty="0">
+                <a:solidFill>
+                  <a:srgbClr val="000000"/>
+                </a:solidFill>
+                <a:latin typeface="Courier New" panose="02070309020205020404" pitchFamily="49" charset="0"/>
+              </a:rPr>
               <a:t> </a:t>
             </a:r>
             <a:r>
-              <a:rPr lang="en-US" altLang="en-US" dirty="0"/>
-              <a:t>system call.  Some reasons for doing so:</a:t>
-            </a:r>
-          </a:p>
-          <a:p>
-            <a:pPr lvl="1"/>
-            <a:r>
-              <a:rPr lang="en-US" altLang="en-US" dirty="0"/>
-              <a:t>Child has exceeded allocated resources</a:t>
-            </a:r>
-          </a:p>
-          <a:p>
-            <a:pPr lvl="1"/>
-            <a:r>
-              <a:rPr lang="en-US" altLang="en-US" dirty="0"/>
-              <a:t>Task assigned to child is no longer required</a:t>
-            </a:r>
-          </a:p>
-          <a:p>
-            <a:pPr lvl="1"/>
-            <a:r>
-              <a:rPr lang="en-US" altLang="en-US" dirty="0"/>
-              <a:t>The parent is exiting, and the operating systems does not allow  a child to continue if its parent terminates</a:t>
+              <a:rPr lang="en-US" altLang="en-US" sz="2000" b="1" dirty="0">
+                <a:solidFill>
+                  <a:srgbClr val="000000"/>
+                </a:solidFill>
+                <a:latin typeface="Courier New" panose="02070309020205020404" pitchFamily="49" charset="0"/>
+              </a:rPr>
+              <a:t>wait()</a:t>
+            </a:r>
+            <a:r>
+              <a:rPr lang="en-US" altLang="en-US" dirty="0"/>
+              <a:t>, process is an </a:t>
+            </a:r>
+            <a:r>
+              <a:rPr lang="en-US" altLang="en-US" b="1" dirty="0">
+                <a:solidFill>
+                  <a:srgbClr val="006699"/>
+                </a:solidFill>
+                <a:latin typeface="+mj-lt"/>
+              </a:rPr>
+              <a:t>orphan</a:t>
             </a:r>
           </a:p>
         </p:txBody>
@@ -9375,10 +9454,10 @@
       </p:grpSpPr>
       <p:sp>
         <p:nvSpPr>
-          <p:cNvPr id="54274" name="Rectangle 2">
-            <a:extLst>
-              <a:ext uri="{FF2B5EF4-FFF2-40B4-BE49-F238E27FC236}">
-                <a16:creationId xmlns:a16="http://schemas.microsoft.com/office/drawing/2014/main" id="{30622719-68BE-4BB0-B168-1A3AE8D09602}"/>
+          <p:cNvPr id="52226" name="Rectangle 2">
+            <a:extLst>
+              <a:ext uri="{FF2B5EF4-FFF2-40B4-BE49-F238E27FC236}">
+                <a16:creationId xmlns:a16="http://schemas.microsoft.com/office/drawing/2014/main" xmlns="" id="{B3A2AC5D-C916-47B2-8787-ACB9BD2F9B0E}"/>
               </a:ext>
             </a:extLst>
           </p:cNvPr>
@@ -9391,8 +9470,8 @@
         </p:nvSpPr>
         <p:spPr>
           <a:xfrm>
-            <a:off x="1981200" y="134817"/>
-            <a:ext cx="8229600" cy="576263"/>
+            <a:off x="1981200" y="227013"/>
+            <a:ext cx="8229600" cy="576262"/>
           </a:xfrm>
         </p:spPr>
         <p:txBody>
@@ -9403,7 +9482,7 @@
           <a:p>
             <a:pPr eaLnBrk="1" hangingPunct="1"/>
             <a:r>
-              <a:rPr lang="en-US" altLang="en-US" dirty="0"/>
+              <a:rPr lang="en-US" altLang="en-US"/>
               <a:t>Process Termination</a:t>
             </a:r>
           </a:p>
@@ -9411,10 +9490,10 @@
       </p:sp>
       <p:sp>
         <p:nvSpPr>
-          <p:cNvPr id="54275" name="Rectangle 3">
-            <a:extLst>
-              <a:ext uri="{FF2B5EF4-FFF2-40B4-BE49-F238E27FC236}">
-                <a16:creationId xmlns:a16="http://schemas.microsoft.com/office/drawing/2014/main" id="{C7E8DAD2-CD54-4141-B861-1A2932EF060A}"/>
+          <p:cNvPr id="52227" name="Rectangle 3">
+            <a:extLst>
+              <a:ext uri="{FF2B5EF4-FFF2-40B4-BE49-F238E27FC236}">
+                <a16:creationId xmlns:a16="http://schemas.microsoft.com/office/drawing/2014/main" xmlns="" id="{9AB8093C-E173-4473-A450-3BC8EBA8DE1B}"/>
               </a:ext>
             </a:extLst>
           </p:cNvPr>
@@ -9427,51 +9506,43 @@
         </p:nvSpPr>
         <p:spPr>
           <a:xfrm>
-            <a:off x="2379908" y="781418"/>
-            <a:ext cx="7033724" cy="4787045"/>
+            <a:off x="2344738" y="1127982"/>
+            <a:ext cx="7303354" cy="4463927"/>
           </a:xfrm>
         </p:spPr>
         <p:txBody>
           <a:bodyPr>
-            <a:normAutofit fontScale="77500" lnSpcReduction="20000"/>
+            <a:normAutofit fontScale="92500" lnSpcReduction="20000"/>
           </a:bodyPr>
           <a:lstStyle/>
           <a:p>
-            <a:pPr marL="457200" lvl="1" indent="0">
-              <a:buNone/>
-            </a:pPr>
-            <a:endParaRPr lang="en-US" altLang="en-US" sz="800" dirty="0"/>
-          </a:p>
-          <a:p>
-            <a:r>
-              <a:rPr lang="en-US" altLang="en-US" dirty="0"/>
-              <a:t>Some operating systems do not allow child to exists if its parent has terminated.  If a process terminates, then all its children must also be terminated.</a:t>
+            <a:r>
+              <a:rPr lang="en-US" altLang="en-US" dirty="0"/>
+              <a:t>Process executes last statement and then asks the operating system to delete it using the </a:t>
+            </a:r>
+            <a:r>
+              <a:rPr lang="en-US" altLang="en-US" sz="2000" b="1" dirty="0">
+                <a:solidFill>
+                  <a:srgbClr val="000000"/>
+                </a:solidFill>
+                <a:latin typeface="Courier New" panose="02070309020205020404" pitchFamily="49" charset="0"/>
+              </a:rPr>
+              <a:t>exit()</a:t>
+            </a:r>
+            <a:r>
+              <a:rPr lang="en-US" altLang="en-US" sz="2000" dirty="0"/>
+              <a:t> </a:t>
+            </a:r>
+            <a:r>
+              <a:rPr lang="en-US" altLang="en-US" dirty="0"/>
+              <a:t>system call.</a:t>
             </a:r>
           </a:p>
           <a:p>
             <a:pPr lvl="1"/>
             <a:r>
-              <a:rPr lang="en-US" altLang="en-US" b="1" dirty="0"/>
-              <a:t>cascading termination.  </a:t>
-            </a:r>
-            <a:r>
-              <a:rPr lang="en-US" altLang="en-US" dirty="0"/>
-              <a:t>All children, grandchildren, etc.,  are  terminated.</a:t>
-            </a:r>
-            <a:endParaRPr lang="en-US" altLang="en-US" b="1" dirty="0"/>
-          </a:p>
-          <a:p>
-            <a:pPr lvl="1"/>
-            <a:r>
-              <a:rPr lang="en-US" altLang="en-US" dirty="0"/>
-              <a:t>The termination is initiated by the operating system.</a:t>
-            </a:r>
-            <a:endParaRPr lang="en-US" altLang="en-US" b="1" dirty="0"/>
-          </a:p>
-          <a:p>
-            <a:r>
-              <a:rPr lang="en-US" altLang="en-US" dirty="0"/>
-              <a:t>The parent process may wait for termination of a child process by using the </a:t>
+              <a:rPr lang="en-US" altLang="en-US" dirty="0"/>
+              <a:t>Returns  status data from child to parent (via </a:t>
             </a:r>
             <a:r>
               <a:rPr lang="en-US" altLang="en-US" sz="2000" b="1" dirty="0">
@@ -9484,106 +9555,67 @@
             </a:r>
             <a:r>
               <a:rPr lang="en-US" altLang="en-US" dirty="0"/>
-              <a:t>system call</a:t>
-            </a:r>
-            <a:r>
-              <a:rPr lang="en-US" altLang="en-US" b="1" dirty="0">
+              <a:t>)</a:t>
+            </a:r>
+          </a:p>
+          <a:p>
+            <a:pPr lvl="1"/>
+            <a:r>
+              <a:rPr lang="en-US" altLang="en-US" dirty="0"/>
+              <a:t>Process</a:t>
+            </a:r>
+            <a:r>
+              <a:rPr lang="ja-JP" altLang="en-US" dirty="0"/>
+              <a:t>’</a:t>
+            </a:r>
+            <a:r>
+              <a:rPr lang="en-US" altLang="ja-JP" dirty="0"/>
+              <a:t> resources are deallocated by operating system</a:t>
+            </a:r>
+            <a:endParaRPr lang="en-US" altLang="en-US" dirty="0"/>
+          </a:p>
+          <a:p>
+            <a:r>
+              <a:rPr lang="en-US" altLang="en-US" dirty="0"/>
+              <a:t>Parent may terminate the execution of children processes  using the </a:t>
+            </a:r>
+            <a:r>
+              <a:rPr lang="en-US" altLang="en-US" sz="2000" b="1" dirty="0">
                 <a:solidFill>
                   <a:srgbClr val="000000"/>
                 </a:solidFill>
                 <a:latin typeface="Courier New" panose="02070309020205020404" pitchFamily="49" charset="0"/>
               </a:rPr>
-              <a:t>. </a:t>
-            </a:r>
-            <a:r>
-              <a:rPr lang="en-US" altLang="en-US" dirty="0"/>
-              <a:t>The call returns status information and the pid of the terminated process</a:t>
-            </a:r>
-            <a:endParaRPr lang="en-US" altLang="en-US" b="1" dirty="0">
-              <a:solidFill>
-                <a:srgbClr val="000000"/>
-              </a:solidFill>
-              <a:latin typeface="Courier New" panose="02070309020205020404" pitchFamily="49" charset="0"/>
-            </a:endParaRPr>
-          </a:p>
-          <a:p>
-            <a:pPr>
-              <a:buFont typeface="Monotype Sorts" pitchFamily="-84" charset="2"/>
-              <a:buNone/>
-            </a:pPr>
-            <a:r>
-              <a:rPr lang="en-US" altLang="en-US" b="1" dirty="0">
-                <a:solidFill>
-                  <a:srgbClr val="000000"/>
-                </a:solidFill>
-                <a:latin typeface="Courier New" panose="02070309020205020404" pitchFamily="49" charset="0"/>
-              </a:rPr>
-              <a:t>      pid = wait(&amp;status); </a:t>
-            </a:r>
-          </a:p>
-          <a:p>
-            <a:r>
-              <a:rPr lang="en-US" altLang="en-US" dirty="0"/>
-              <a:t>If no parent waiting (did not invoke </a:t>
-            </a:r>
-            <a:r>
-              <a:rPr lang="en-US" altLang="en-US" sz="2000" b="1" dirty="0">
-                <a:solidFill>
-                  <a:srgbClr val="000000"/>
-                </a:solidFill>
-                <a:latin typeface="Courier New" panose="02070309020205020404" pitchFamily="49" charset="0"/>
-              </a:rPr>
-              <a:t>wait()</a:t>
-            </a:r>
-            <a:r>
-              <a:rPr lang="en-US" altLang="en-US" dirty="0"/>
-              <a:t>) process is a </a:t>
-            </a:r>
-            <a:r>
-              <a:rPr lang="en-US" altLang="en-US" b="1" dirty="0">
-                <a:solidFill>
-                  <a:srgbClr val="006699"/>
-                </a:solidFill>
-                <a:latin typeface="+mj-lt"/>
-              </a:rPr>
-              <a:t>zombie</a:t>
-            </a:r>
-          </a:p>
-          <a:p>
-            <a:r>
-              <a:rPr lang="en-US" altLang="en-US" dirty="0"/>
-              <a:t>If parent terminated without invoking</a:t>
-            </a:r>
-            <a:r>
-              <a:rPr lang="en-US" altLang="en-US" b="1" dirty="0">
-                <a:solidFill>
-                  <a:srgbClr val="000000"/>
-                </a:solidFill>
-                <a:latin typeface="Courier New" panose="02070309020205020404" pitchFamily="49" charset="0"/>
-              </a:rPr>
+              <a:t>abort()</a:t>
+            </a:r>
+            <a:r>
+              <a:rPr lang="en-US" altLang="en-US" sz="2000" dirty="0"/>
               <a:t> </a:t>
             </a:r>
             <a:r>
-              <a:rPr lang="en-US" altLang="en-US" sz="2000" b="1" dirty="0">
-                <a:solidFill>
-                  <a:srgbClr val="000000"/>
-                </a:solidFill>
-                <a:latin typeface="Courier New" panose="02070309020205020404" pitchFamily="49" charset="0"/>
-              </a:rPr>
-              <a:t>wait()</a:t>
-            </a:r>
-            <a:r>
-              <a:rPr lang="en-US" altLang="en-US" dirty="0"/>
-              <a:t>, process is an </a:t>
-            </a:r>
-            <a:r>
-              <a:rPr lang="en-US" altLang="en-US" b="1" dirty="0">
-                <a:solidFill>
-                  <a:srgbClr val="006699"/>
-                </a:solidFill>
-                <a:latin typeface="+mj-lt"/>
-              </a:rPr>
-              <a:t>orphan</a:t>
+              <a:rPr lang="en-US" altLang="en-US" dirty="0"/>
+              <a:t>system call.  Some reasons for doing so:</a:t>
+            </a:r>
+          </a:p>
+          <a:p>
+            <a:pPr lvl="1"/>
+            <a:r>
+              <a:rPr lang="en-US" altLang="en-US" dirty="0"/>
+              <a:t>Child has exceeded allocated resources</a:t>
+            </a:r>
+          </a:p>
+          <a:p>
+            <a:pPr lvl="1"/>
+            <a:r>
+              <a:rPr lang="en-US" altLang="en-US" dirty="0"/>
+              <a:t>Task assigned to child is no longer required</a:t>
+            </a:r>
+          </a:p>
+          <a:p>
+            <a:pPr lvl="1"/>
+            <a:r>
+              <a:rPr lang="en-US" altLang="en-US" dirty="0"/>
+              <a:t>The parent is exiting, and the operating systems does not allow  a child to continue if its parent terminates</a:t>
             </a:r>
           </a:p>
         </p:txBody>
@@ -9618,7 +9650,7 @@
           <p:cNvPr id="56322" name="Title 1">
             <a:extLst>
               <a:ext uri="{FF2B5EF4-FFF2-40B4-BE49-F238E27FC236}">
-                <a16:creationId xmlns:a16="http://schemas.microsoft.com/office/drawing/2014/main" id="{CCF9DC54-118C-447A-A3AB-7C2E989968AC}"/>
+                <a16:creationId xmlns:a16="http://schemas.microsoft.com/office/drawing/2014/main" xmlns="" id="{CCF9DC54-118C-447A-A3AB-7C2E989968AC}"/>
               </a:ext>
             </a:extLst>
           </p:cNvPr>
@@ -9651,7 +9683,7 @@
           <p:cNvPr id="56323" name="Content Placeholder 2">
             <a:extLst>
               <a:ext uri="{FF2B5EF4-FFF2-40B4-BE49-F238E27FC236}">
-                <a16:creationId xmlns:a16="http://schemas.microsoft.com/office/drawing/2014/main" id="{8675C949-6A9A-4638-902C-843874920EE2}"/>
+                <a16:creationId xmlns:a16="http://schemas.microsoft.com/office/drawing/2014/main" xmlns="" id="{8675C949-6A9A-4638-902C-843874920EE2}"/>
               </a:ext>
             </a:extLst>
           </p:cNvPr>
@@ -9766,7 +9798,7 @@
           <p:cNvPr id="57346" name="Title 1">
             <a:extLst>
               <a:ext uri="{FF2B5EF4-FFF2-40B4-BE49-F238E27FC236}">
-                <a16:creationId xmlns:a16="http://schemas.microsoft.com/office/drawing/2014/main" id="{D6E94F8E-122F-4FED-9B3D-FD01E2845895}"/>
+                <a16:creationId xmlns:a16="http://schemas.microsoft.com/office/drawing/2014/main" xmlns="" id="{D6E94F8E-122F-4FED-9B3D-FD01E2845895}"/>
               </a:ext>
             </a:extLst>
           </p:cNvPr>
@@ -9803,7 +9835,7 @@
           <p:cNvPr id="57347" name="Content Placeholder 2">
             <a:extLst>
               <a:ext uri="{FF2B5EF4-FFF2-40B4-BE49-F238E27FC236}">
-                <a16:creationId xmlns:a16="http://schemas.microsoft.com/office/drawing/2014/main" id="{360D7C25-6ED1-40E0-9C1E-876BC3EC89DC}"/>
+                <a16:creationId xmlns:a16="http://schemas.microsoft.com/office/drawing/2014/main" xmlns="" id="{360D7C25-6ED1-40E0-9C1E-876BC3EC89DC}"/>
               </a:ext>
             </a:extLst>
           </p:cNvPr>
@@ -9955,7 +9987,7 @@
           <p:cNvPr id="57348" name="Picture 1">
             <a:extLst>
               <a:ext uri="{FF2B5EF4-FFF2-40B4-BE49-F238E27FC236}">
-                <a16:creationId xmlns:a16="http://schemas.microsoft.com/office/drawing/2014/main" id="{FC10B725-AB13-417A-BEE0-FCE2190A3E97}"/>
+                <a16:creationId xmlns:a16="http://schemas.microsoft.com/office/drawing/2014/main" xmlns="" id="{FC10B725-AB13-417A-BEE0-FCE2190A3E97}"/>
               </a:ext>
             </a:extLst>
           </p:cNvPr>
@@ -9965,10 +9997,10 @@
           <p:nvPr/>
         </p:nvPicPr>
         <p:blipFill>
-          <a:blip r:embed="rId3">
+          <a:blip r:embed="rId3" cstate="print">
             <a:extLst>
               <a:ext uri="{28A0092B-C50C-407E-A947-70E740481C1C}">
-                <a14:useLocalDpi xmlns:a14="http://schemas.microsoft.com/office/drawing/2010/main" val="0"/>
+                <a14:useLocalDpi xmlns:a14="http://schemas.microsoft.com/office/drawing/2010/main" xmlns="" val="0"/>
               </a:ext>
             </a:extLst>
           </a:blip>
@@ -9991,14 +10023,14 @@
           </a:ln>
           <a:extLst>
             <a:ext uri="{909E8E84-426E-40DD-AFC4-6F175D3DCCD1}">
-              <a14:hiddenFill xmlns:a14="http://schemas.microsoft.com/office/drawing/2010/main">
+              <a14:hiddenFill xmlns:a14="http://schemas.microsoft.com/office/drawing/2010/main" xmlns="">
                 <a:solidFill>
                   <a:srgbClr val="FFFFFF"/>
                 </a:solidFill>
               </a14:hiddenFill>
             </a:ext>
             <a:ext uri="{91240B29-F687-4F45-9708-019B960494DF}">
-              <a14:hiddenLine xmlns:a14="http://schemas.microsoft.com/office/drawing/2010/main" w="9525">
+              <a14:hiddenLine xmlns:a14="http://schemas.microsoft.com/office/drawing/2010/main" xmlns="" w="9525">
                 <a:solidFill>
                   <a:srgbClr val="000000"/>
                 </a:solidFill>
@@ -10040,7 +10072,7 @@
           <p:cNvPr id="59394" name="Title 1">
             <a:extLst>
               <a:ext uri="{FF2B5EF4-FFF2-40B4-BE49-F238E27FC236}">
-                <a16:creationId xmlns:a16="http://schemas.microsoft.com/office/drawing/2014/main" id="{09D0E5E8-A027-43B0-871E-ED73DF85B2CC}"/>
+                <a16:creationId xmlns:a16="http://schemas.microsoft.com/office/drawing/2014/main" xmlns="" id="{09D0E5E8-A027-43B0-871E-ED73DF85B2CC}"/>
               </a:ext>
             </a:extLst>
           </p:cNvPr>
@@ -10075,7 +10107,7 @@
           <p:cNvPr id="59395" name="Content Placeholder 2">
             <a:extLst>
               <a:ext uri="{FF2B5EF4-FFF2-40B4-BE49-F238E27FC236}">
-                <a16:creationId xmlns:a16="http://schemas.microsoft.com/office/drawing/2014/main" id="{2EF26BE1-FCB0-440F-8834-E9B667D36DB4}"/>
+                <a16:creationId xmlns:a16="http://schemas.microsoft.com/office/drawing/2014/main" xmlns="" id="{2EF26BE1-FCB0-440F-8834-E9B667D36DB4}"/>
               </a:ext>
             </a:extLst>
           </p:cNvPr>
@@ -10227,7 +10259,7 @@
             <a:r>
               <a:rPr lang="en-US" altLang="en-US" b="1" dirty="0">
                 <a:solidFill>
-                  <a:srgbClr val="006699"/>
+                  <a:srgbClr val="FF0000"/>
                 </a:solidFill>
                 <a:latin typeface="+mj-lt"/>
               </a:rPr>
@@ -10236,7 +10268,7 @@
             <a:r>
               <a:rPr lang="en-US" altLang="en-US" b="1" dirty="0">
                 <a:solidFill>
-                  <a:srgbClr val="3366FF"/>
+                  <a:srgbClr val="FF0000"/>
                 </a:solidFill>
               </a:rPr>
               <a:t> </a:t>
@@ -10244,7 +10276,7 @@
             <a:r>
               <a:rPr lang="en-US" altLang="en-US" b="1" dirty="0">
                 <a:solidFill>
-                  <a:srgbClr val="006699"/>
+                  <a:srgbClr val="FF0000"/>
                 </a:solidFill>
                 <a:latin typeface="+mj-lt"/>
               </a:rPr>
@@ -10256,7 +10288,7 @@
             <a:r>
               <a:rPr lang="en-US" altLang="en-US" b="1" dirty="0">
                 <a:solidFill>
-                  <a:srgbClr val="006699"/>
+                  <a:srgbClr val="FF0000"/>
                 </a:solidFill>
                 <a:latin typeface="+mj-lt"/>
               </a:rPr>
@@ -10299,7 +10331,7 @@
           <p:cNvPr id="61442" name="Rectangle 2">
             <a:extLst>
               <a:ext uri="{FF2B5EF4-FFF2-40B4-BE49-F238E27FC236}">
-                <a16:creationId xmlns:a16="http://schemas.microsoft.com/office/drawing/2014/main" id="{D24006AF-9462-4FD7-8602-D757042B979A}"/>
+                <a16:creationId xmlns:a16="http://schemas.microsoft.com/office/drawing/2014/main" xmlns="" id="{D24006AF-9462-4FD7-8602-D757042B979A}"/>
               </a:ext>
             </a:extLst>
           </p:cNvPr>
@@ -10335,7 +10367,7 @@
           <p:cNvPr id="61443" name="Rectangle 3">
             <a:extLst>
               <a:ext uri="{FF2B5EF4-FFF2-40B4-BE49-F238E27FC236}">
-                <a16:creationId xmlns:a16="http://schemas.microsoft.com/office/drawing/2014/main" id="{00B4232E-A93C-4613-91D0-E8A0948B61F1}"/>
+                <a16:creationId xmlns:a16="http://schemas.microsoft.com/office/drawing/2014/main" xmlns="" id="{00B4232E-A93C-4613-91D0-E8A0948B61F1}"/>
               </a:ext>
             </a:extLst>
           </p:cNvPr>
@@ -10358,14 +10390,14 @@
           </a:ln>
           <a:extLst>
             <a:ext uri="{909E8E84-426E-40DD-AFC4-6F175D3DCCD1}">
-              <a14:hiddenFill xmlns:a14="http://schemas.microsoft.com/office/drawing/2010/main">
+              <a14:hiddenFill xmlns:a14="http://schemas.microsoft.com/office/drawing/2010/main" xmlns="">
                 <a:solidFill>
                   <a:srgbClr val="FFFFFF"/>
                 </a:solidFill>
               </a14:hiddenFill>
             </a:ext>
             <a:ext uri="{91240B29-F687-4F45-9708-019B960494DF}">
-              <a14:hiddenLine xmlns:a14="http://schemas.microsoft.com/office/drawing/2010/main" w="9525">
+              <a14:hiddenLine xmlns:a14="http://schemas.microsoft.com/office/drawing/2010/main" xmlns="" w="9525">
                 <a:solidFill>
                   <a:srgbClr val="000000"/>
                 </a:solidFill>
@@ -10583,7 +10615,7 @@
           <p:cNvPr id="61444" name="Picture 1">
             <a:extLst>
               <a:ext uri="{FF2B5EF4-FFF2-40B4-BE49-F238E27FC236}">
-                <a16:creationId xmlns:a16="http://schemas.microsoft.com/office/drawing/2014/main" id="{3ED38AED-C0F5-4084-BE69-BF6EFD7FF583}"/>
+                <a16:creationId xmlns:a16="http://schemas.microsoft.com/office/drawing/2014/main" xmlns="" id="{3ED38AED-C0F5-4084-BE69-BF6EFD7FF583}"/>
               </a:ext>
             </a:extLst>
           </p:cNvPr>
@@ -10596,7 +10628,7 @@
           <a:blip r:embed="rId3">
             <a:extLst>
               <a:ext uri="{28A0092B-C50C-407E-A947-70E740481C1C}">
-                <a14:useLocalDpi xmlns:a14="http://schemas.microsoft.com/office/drawing/2010/main" val="0"/>
+                <a14:useLocalDpi xmlns:a14="http://schemas.microsoft.com/office/drawing/2010/main" xmlns="" val="0"/>
               </a:ext>
             </a:extLst>
           </a:blip>
@@ -10619,14 +10651,14 @@
           </a:ln>
           <a:extLst>
             <a:ext uri="{909E8E84-426E-40DD-AFC4-6F175D3DCCD1}">
-              <a14:hiddenFill xmlns:a14="http://schemas.microsoft.com/office/drawing/2010/main">
+              <a14:hiddenFill xmlns:a14="http://schemas.microsoft.com/office/drawing/2010/main" xmlns="">
                 <a:solidFill>
                   <a:srgbClr val="FFFFFF"/>
                 </a:solidFill>
               </a14:hiddenFill>
             </a:ext>
             <a:ext uri="{91240B29-F687-4F45-9708-019B960494DF}">
-              <a14:hiddenLine xmlns:a14="http://schemas.microsoft.com/office/drawing/2010/main" w="9525">
+              <a14:hiddenLine xmlns:a14="http://schemas.microsoft.com/office/drawing/2010/main" xmlns="" w="9525">
                 <a:solidFill>
                   <a:srgbClr val="000000"/>
                 </a:solidFill>
@@ -10668,7 +10700,7 @@
           <p:cNvPr id="9218" name="Title 1">
             <a:extLst>
               <a:ext uri="{FF2B5EF4-FFF2-40B4-BE49-F238E27FC236}">
-                <a16:creationId xmlns:a16="http://schemas.microsoft.com/office/drawing/2014/main" id="{28163CEC-73A6-4E96-880E-3A57C5F4B18D}"/>
+                <a16:creationId xmlns:a16="http://schemas.microsoft.com/office/drawing/2014/main" xmlns="" id="{28163CEC-73A6-4E96-880E-3A57C5F4B18D}"/>
               </a:ext>
             </a:extLst>
           </p:cNvPr>
@@ -10704,7 +10736,7 @@
           <p:cNvPr id="9219" name="Content Placeholder 2">
             <a:extLst>
               <a:ext uri="{FF2B5EF4-FFF2-40B4-BE49-F238E27FC236}">
-                <a16:creationId xmlns:a16="http://schemas.microsoft.com/office/drawing/2014/main" id="{A0DD2938-EA4E-48BC-A833-20DE32AC1BFC}"/>
+                <a16:creationId xmlns:a16="http://schemas.microsoft.com/office/drawing/2014/main" xmlns="" id="{A0DD2938-EA4E-48BC-A833-20DE32AC1BFC}"/>
               </a:ext>
             </a:extLst>
           </p:cNvPr>
@@ -10820,7 +10852,7 @@
           <p:cNvPr id="11266" name="Rectangle 2">
             <a:extLst>
               <a:ext uri="{FF2B5EF4-FFF2-40B4-BE49-F238E27FC236}">
-                <a16:creationId xmlns:a16="http://schemas.microsoft.com/office/drawing/2014/main" id="{17E8AE27-E50C-40A0-B477-CFFEC3475E01}"/>
+                <a16:creationId xmlns:a16="http://schemas.microsoft.com/office/drawing/2014/main" xmlns="" id="{17E8AE27-E50C-40A0-B477-CFFEC3475E01}"/>
               </a:ext>
             </a:extLst>
           </p:cNvPr>
@@ -10856,7 +10888,7 @@
           <p:cNvPr id="11267" name="Rectangle 3">
             <a:extLst>
               <a:ext uri="{FF2B5EF4-FFF2-40B4-BE49-F238E27FC236}">
-                <a16:creationId xmlns:a16="http://schemas.microsoft.com/office/drawing/2014/main" id="{5D446FCF-843C-4B0E-B66C-D60BED27776C}"/>
+                <a16:creationId xmlns:a16="http://schemas.microsoft.com/office/drawing/2014/main" xmlns="" id="{5D446FCF-843C-4B0E-B66C-D60BED27776C}"/>
               </a:ext>
             </a:extLst>
           </p:cNvPr>
@@ -11125,7 +11157,7 @@
           <p:cNvPr id="13314" name="Rectangle 2">
             <a:extLst>
               <a:ext uri="{FF2B5EF4-FFF2-40B4-BE49-F238E27FC236}">
-                <a16:creationId xmlns:a16="http://schemas.microsoft.com/office/drawing/2014/main" id="{39FB78B1-A72C-494F-9718-8FF44F7505B0}"/>
+                <a16:creationId xmlns:a16="http://schemas.microsoft.com/office/drawing/2014/main" xmlns="" id="{39FB78B1-A72C-494F-9718-8FF44F7505B0}"/>
               </a:ext>
             </a:extLst>
           </p:cNvPr>
@@ -11161,7 +11193,7 @@
           <p:cNvPr id="13315" name="Rectangle 3">
             <a:extLst>
               <a:ext uri="{FF2B5EF4-FFF2-40B4-BE49-F238E27FC236}">
-                <a16:creationId xmlns:a16="http://schemas.microsoft.com/office/drawing/2014/main" id="{1B99AC1A-7079-467A-A88A-5DCC86E364CB}"/>
+                <a16:creationId xmlns:a16="http://schemas.microsoft.com/office/drawing/2014/main" xmlns="" id="{1B99AC1A-7079-467A-A88A-5DCC86E364CB}"/>
               </a:ext>
             </a:extLst>
           </p:cNvPr>
@@ -11309,7 +11341,7 @@
           <p:cNvPr id="15362" name="Rectangle 2">
             <a:extLst>
               <a:ext uri="{FF2B5EF4-FFF2-40B4-BE49-F238E27FC236}">
-                <a16:creationId xmlns:a16="http://schemas.microsoft.com/office/drawing/2014/main" id="{20AFA67C-5037-4199-ADB3-2B949804BC7A}"/>
+                <a16:creationId xmlns:a16="http://schemas.microsoft.com/office/drawing/2014/main" xmlns="" id="{20AFA67C-5037-4199-ADB3-2B949804BC7A}"/>
               </a:ext>
             </a:extLst>
           </p:cNvPr>
@@ -11345,7 +11377,7 @@
           <p:cNvPr id="15363" name="Picture 1">
             <a:extLst>
               <a:ext uri="{FF2B5EF4-FFF2-40B4-BE49-F238E27FC236}">
-                <a16:creationId xmlns:a16="http://schemas.microsoft.com/office/drawing/2014/main" id="{56913459-B2A5-4780-A47A-63C55AF8C370}"/>
+                <a16:creationId xmlns:a16="http://schemas.microsoft.com/office/drawing/2014/main" xmlns="" id="{56913459-B2A5-4780-A47A-63C55AF8C370}"/>
               </a:ext>
             </a:extLst>
           </p:cNvPr>
@@ -11358,7 +11390,7 @@
           <a:blip r:embed="rId3">
             <a:extLst>
               <a:ext uri="{28A0092B-C50C-407E-A947-70E740481C1C}">
-                <a14:useLocalDpi xmlns:a14="http://schemas.microsoft.com/office/drawing/2010/main" val="0"/>
+                <a14:useLocalDpi xmlns:a14="http://schemas.microsoft.com/office/drawing/2010/main" xmlns="" val="0"/>
               </a:ext>
             </a:extLst>
           </a:blip>
@@ -11381,14 +11413,14 @@
           </a:ln>
           <a:extLst>
             <a:ext uri="{909E8E84-426E-40DD-AFC4-6F175D3DCCD1}">
-              <a14:hiddenFill xmlns:a14="http://schemas.microsoft.com/office/drawing/2010/main">
+              <a14:hiddenFill xmlns:a14="http://schemas.microsoft.com/office/drawing/2010/main" xmlns="">
                 <a:solidFill>
                   <a:srgbClr val="FFFFFF"/>
                 </a:solidFill>
               </a14:hiddenFill>
             </a:ext>
             <a:ext uri="{91240B29-F687-4F45-9708-019B960494DF}">
-              <a14:hiddenLine xmlns:a14="http://schemas.microsoft.com/office/drawing/2010/main" w="9525">
+              <a14:hiddenLine xmlns:a14="http://schemas.microsoft.com/office/drawing/2010/main" xmlns="" w="9525">
                 <a:solidFill>
                   <a:srgbClr val="000000"/>
                 </a:solidFill>
@@ -11430,7 +11462,7 @@
           <p:cNvPr id="17410" name="Title 1">
             <a:extLst>
               <a:ext uri="{FF2B5EF4-FFF2-40B4-BE49-F238E27FC236}">
-                <a16:creationId xmlns:a16="http://schemas.microsoft.com/office/drawing/2014/main" id="{5F0918BC-EE47-4B64-B75C-97D41C08DCAD}"/>
+                <a16:creationId xmlns:a16="http://schemas.microsoft.com/office/drawing/2014/main" xmlns="" id="{5F0918BC-EE47-4B64-B75C-97D41C08DCAD}"/>
               </a:ext>
             </a:extLst>
           </p:cNvPr>
@@ -11465,7 +11497,7 @@
           <p:cNvPr id="17411" name="Picture 1">
             <a:extLst>
               <a:ext uri="{FF2B5EF4-FFF2-40B4-BE49-F238E27FC236}">
-                <a16:creationId xmlns:a16="http://schemas.microsoft.com/office/drawing/2014/main" id="{E58EFC16-5ABF-4B34-B546-50AB9FB81842}"/>
+                <a16:creationId xmlns:a16="http://schemas.microsoft.com/office/drawing/2014/main" xmlns="" id="{E58EFC16-5ABF-4B34-B546-50AB9FB81842}"/>
               </a:ext>
             </a:extLst>
           </p:cNvPr>
@@ -11475,10 +11507,10 @@
           <p:nvPr/>
         </p:nvPicPr>
         <p:blipFill>
-          <a:blip r:embed="rId2">
+          <a:blip r:embed="rId2" cstate="print">
             <a:extLst>
               <a:ext uri="{28A0092B-C50C-407E-A947-70E740481C1C}">
-                <a14:useLocalDpi xmlns:a14="http://schemas.microsoft.com/office/drawing/2010/main" val="0"/>
+                <a14:useLocalDpi xmlns:a14="http://schemas.microsoft.com/office/drawing/2010/main" xmlns="" val="0"/>
               </a:ext>
             </a:extLst>
           </a:blip>
@@ -11501,14 +11533,14 @@
           </a:ln>
           <a:extLst>
             <a:ext uri="{909E8E84-426E-40DD-AFC4-6F175D3DCCD1}">
-              <a14:hiddenFill xmlns:a14="http://schemas.microsoft.com/office/drawing/2010/main">
+              <a14:hiddenFill xmlns:a14="http://schemas.microsoft.com/office/drawing/2010/main" xmlns="">
                 <a:solidFill>
                   <a:srgbClr val="FFFFFF"/>
                 </a:solidFill>
               </a14:hiddenFill>
             </a:ext>
             <a:ext uri="{91240B29-F687-4F45-9708-019B960494DF}">
-              <a14:hiddenLine xmlns:a14="http://schemas.microsoft.com/office/drawing/2010/main" w="9525">
+              <a14:hiddenLine xmlns:a14="http://schemas.microsoft.com/office/drawing/2010/main" xmlns="" w="9525">
                 <a:solidFill>
                   <a:srgbClr val="000000"/>
                 </a:solidFill>
@@ -11550,7 +11582,7 @@
           <p:cNvPr id="18434" name="Rectangle 2">
             <a:extLst>
               <a:ext uri="{FF2B5EF4-FFF2-40B4-BE49-F238E27FC236}">
-                <a16:creationId xmlns:a16="http://schemas.microsoft.com/office/drawing/2014/main" id="{0890CFA9-9E5C-4419-8C0A-3AE15BC75848}"/>
+                <a16:creationId xmlns:a16="http://schemas.microsoft.com/office/drawing/2014/main" xmlns="" id="{0890CFA9-9E5C-4419-8C0A-3AE15BC75848}"/>
               </a:ext>
             </a:extLst>
           </p:cNvPr>
@@ -11586,7 +11618,7 @@
           <p:cNvPr id="18435" name="Rectangle 3">
             <a:extLst>
               <a:ext uri="{FF2B5EF4-FFF2-40B4-BE49-F238E27FC236}">
-                <a16:creationId xmlns:a16="http://schemas.microsoft.com/office/drawing/2014/main" id="{024CBB90-3DD4-48C6-830E-D5B680DA86BE}"/>
+                <a16:creationId xmlns:a16="http://schemas.microsoft.com/office/drawing/2014/main" xmlns="" id="{024CBB90-3DD4-48C6-830E-D5B680DA86BE}"/>
               </a:ext>
             </a:extLst>
           </p:cNvPr>
@@ -11604,7 +11636,9 @@
           </a:xfrm>
         </p:spPr>
         <p:txBody>
-          <a:bodyPr/>
+          <a:bodyPr>
+            <a:normAutofit lnSpcReduction="10000"/>
+          </a:bodyPr>
           <a:lstStyle/>
           <a:p>
             <a:r>
@@ -11708,7 +11742,7 @@
           <p:cNvPr id="20482" name="Rectangle 2">
             <a:extLst>
               <a:ext uri="{FF2B5EF4-FFF2-40B4-BE49-F238E27FC236}">
-                <a16:creationId xmlns:a16="http://schemas.microsoft.com/office/drawing/2014/main" id="{03351C7C-1AE3-4532-A2F7-C7EB33BCDB3F}"/>
+                <a16:creationId xmlns:a16="http://schemas.microsoft.com/office/drawing/2014/main" xmlns="" id="{03351C7C-1AE3-4532-A2F7-C7EB33BCDB3F}"/>
               </a:ext>
             </a:extLst>
           </p:cNvPr>
@@ -11744,7 +11778,7 @@
           <p:cNvPr id="20483" name="Picture 1">
             <a:extLst>
               <a:ext uri="{FF2B5EF4-FFF2-40B4-BE49-F238E27FC236}">
-                <a16:creationId xmlns:a16="http://schemas.microsoft.com/office/drawing/2014/main" id="{C48543A4-67CA-450C-8237-41432A1A6BFB}"/>
+                <a16:creationId xmlns:a16="http://schemas.microsoft.com/office/drawing/2014/main" xmlns="" id="{C48543A4-67CA-450C-8237-41432A1A6BFB}"/>
               </a:ext>
             </a:extLst>
           </p:cNvPr>
@@ -11754,10 +11788,10 @@
           <p:nvPr/>
         </p:nvPicPr>
         <p:blipFill>
-          <a:blip r:embed="rId3">
+          <a:blip r:embed="rId3" cstate="print">
             <a:extLst>
               <a:ext uri="{28A0092B-C50C-407E-A947-70E740481C1C}">
-                <a14:useLocalDpi xmlns:a14="http://schemas.microsoft.com/office/drawing/2010/main" val="0"/>
+                <a14:useLocalDpi xmlns:a14="http://schemas.microsoft.com/office/drawing/2010/main" xmlns="" val="0"/>
               </a:ext>
             </a:extLst>
           </a:blip>
@@ -11780,14 +11814,14 @@
           </a:ln>
           <a:extLst>
             <a:ext uri="{909E8E84-426E-40DD-AFC4-6F175D3DCCD1}">
-              <a14:hiddenFill xmlns:a14="http://schemas.microsoft.com/office/drawing/2010/main">
+              <a14:hiddenFill xmlns:a14="http://schemas.microsoft.com/office/drawing/2010/main" xmlns="">
                 <a:solidFill>
                   <a:srgbClr val="FFFFFF"/>
                 </a:solidFill>
               </a14:hiddenFill>
             </a:ext>
             <a:ext uri="{91240B29-F687-4F45-9708-019B960494DF}">
-              <a14:hiddenLine xmlns:a14="http://schemas.microsoft.com/office/drawing/2010/main" w="9525">
+              <a14:hiddenLine xmlns:a14="http://schemas.microsoft.com/office/drawing/2010/main" xmlns="" w="9525">
                 <a:solidFill>
                   <a:srgbClr val="000000"/>
                 </a:solidFill>
@@ -11850,7 +11884,7 @@
     </a:clrScheme>
     <a:fontScheme name="Office">
       <a:majorFont>
-        <a:latin typeface="Aptos Display" panose="02110004020202020204"/>
+        <a:latin typeface="Aptos Display"/>
         <a:ea typeface=""/>
         <a:cs typeface=""/>
         <a:font script="Jpan" typeface="游ゴシック Light"/>
@@ -11902,7 +11936,7 @@
         <a:font script="Tfng" typeface="Ebrima"/>
       </a:majorFont>
       <a:minorFont>
-        <a:latin typeface="Aptos" panose="02110004020202020204"/>
+        <a:latin typeface="Aptos"/>
         <a:ea typeface=""/>
         <a:cs typeface=""/>
         <a:font script="Jpan" typeface="游ゴシック"/>
@@ -12116,7 +12150,7 @@
   <a:extraClrSchemeLst/>
   <a:extLst>
     <a:ext uri="{05A4C25C-085E-4340-85A3-A5531E510DB2}">
-      <thm15:themeFamily xmlns:thm15="http://schemas.microsoft.com/office/thememl/2012/main" name="Office Theme" id="{2E142A2C-CD16-42D6-873A-C26D2A0506FA}" vid="{1BDDFF52-6CD6-40A5-AB3C-68EB2F1E4D0A}"/>
+      <thm15:themeFamily xmlns:thm15="http://schemas.microsoft.com/office/thememl/2012/main" xmlns="" name="Office Theme" id="{2E142A2C-CD16-42D6-873A-C26D2A0506FA}" vid="{1BDDFF52-6CD6-40A5-AB3C-68EB2F1E4D0A}"/>
     </a:ext>
   </a:extLst>
 </a:theme>
@@ -12165,7 +12199,7 @@
     </a:clrScheme>
     <a:fontScheme name="Office">
       <a:majorFont>
-        <a:latin typeface="Aptos Display" panose="02110004020202020204"/>
+        <a:latin typeface="Aptos Display"/>
         <a:ea typeface=""/>
         <a:cs typeface=""/>
         <a:font script="Jpan" typeface="游ゴシック Light"/>
@@ -12217,7 +12251,7 @@
         <a:font script="Tfng" typeface="Ebrima"/>
       </a:majorFont>
       <a:minorFont>
-        <a:latin typeface="Aptos" panose="02110004020202020204"/>
+        <a:latin typeface="Aptos"/>
         <a:ea typeface=""/>
         <a:cs typeface=""/>
         <a:font script="Jpan" typeface="游ゴシック"/>
@@ -12431,7 +12465,7 @@
   <a:extraClrSchemeLst/>
   <a:extLst>
     <a:ext uri="{05A4C25C-085E-4340-85A3-A5531E510DB2}">
-      <thm15:themeFamily xmlns:thm15="http://schemas.microsoft.com/office/thememl/2012/main" name="Office Theme" id="{2E142A2C-CD16-42D6-873A-C26D2A0506FA}" vid="{1BDDFF52-6CD6-40A5-AB3C-68EB2F1E4D0A}"/>
+      <thm15:themeFamily xmlns:thm15="http://schemas.microsoft.com/office/thememl/2012/main" xmlns="" name="Office Theme" id="{2E142A2C-CD16-42D6-873A-C26D2A0506FA}" vid="{1BDDFF52-6CD6-40A5-AB3C-68EB2F1E4D0A}"/>
     </a:ext>
   </a:extLst>
 </a:theme>
